--- a/public/fun/pack/pptx/review/보장점검양식_13_가족점검_오월숲길.pptx
+++ b/public/fun/pack/pptx/review/보장점검양식_13_가족점검_오월숲길.pptx
@@ -3347,7 +3347,7 @@
             <a:r>
               <a:rPr sz="3600" b="1" i="0">
                 <a:solidFill>
-                  <a:srgbClr val="143D21"/>
+                  <a:srgbClr val="1D7236"/>
                 </a:solidFill>
               </a:rPr>
               <a:t>우리 보험 점검 시간</a:t>
@@ -3385,7 +3385,7 @@
             <a:r>
               <a:rPr sz="1700" b="0" i="1">
                 <a:solidFill>
-                  <a:srgbClr val="143D21"/>
+                  <a:srgbClr val="1D7236"/>
                 </a:solidFill>
               </a:rPr>
               <a:t>가족별로 칸을 나눠 정리합니다</a:t>
@@ -3460,7 +3460,7 @@
     <p:bg>
       <p:bgPr>
         <a:solidFill>
-          <a:srgbClr val="D0F1DA"/>
+          <a:srgbClr val="D4F7DE"/>
         </a:solidFill>
         <a:effectLst/>
       </p:bgPr>
@@ -3491,7 +3491,7 @@
           </a:solidFill>
           <a:ln w="25400">
             <a:solidFill>
-              <a:srgbClr val="2B8245"/>
+              <a:srgbClr val="43D66F"/>
             </a:solidFill>
             <a:prstDash val="dash"/>
           </a:ln>
@@ -3534,7 +3534,7 @@
             <a:r>
               <a:rPr sz="3000" b="1" i="0">
                 <a:solidFill>
-                  <a:srgbClr val="143D21"/>
+                  <a:srgbClr val="1D7236"/>
                 </a:solidFill>
               </a:rPr>
               <a:t>점검 대상 현황</a:t>
@@ -3586,30 +3586,30 @@
                   <a:tcPr anchor="ctr" marL="73152" marR="73152">
                     <a:lnL w="9525" cap="flat" cmpd="sng" algn="ctr">
                       <a:solidFill>
-                        <a:srgbClr val="2B8245"/>
+                        <a:srgbClr val="43D66F"/>
                       </a:solidFill>
                       <a:prstDash val="solid"/>
                     </a:lnL>
                     <a:lnR w="9525" cap="flat" cmpd="sng" algn="ctr">
                       <a:solidFill>
-                        <a:srgbClr val="2B8245"/>
+                        <a:srgbClr val="43D66F"/>
                       </a:solidFill>
                       <a:prstDash val="solid"/>
                     </a:lnR>
                     <a:lnT w="9525" cap="flat" cmpd="sng" algn="ctr">
                       <a:solidFill>
-                        <a:srgbClr val="2B8245"/>
+                        <a:srgbClr val="43D66F"/>
                       </a:solidFill>
                       <a:prstDash val="solid"/>
                     </a:lnT>
                     <a:lnB w="9525" cap="flat" cmpd="sng" algn="ctr">
                       <a:solidFill>
-                        <a:srgbClr val="2B8245"/>
+                        <a:srgbClr val="43D66F"/>
                       </a:solidFill>
                       <a:prstDash val="solid"/>
                     </a:lnB>
                     <a:solidFill>
-                      <a:srgbClr val="2B8245"/>
+                      <a:srgbClr val="43D66F"/>
                     </a:solidFill>
                   </a:tcPr>
                 </a:tc>
@@ -3632,30 +3632,30 @@
                   <a:tcPr anchor="ctr" marL="73152" marR="73152">
                     <a:lnL w="9525" cap="flat" cmpd="sng" algn="ctr">
                       <a:solidFill>
-                        <a:srgbClr val="2B8245"/>
+                        <a:srgbClr val="43D66F"/>
                       </a:solidFill>
                       <a:prstDash val="solid"/>
                     </a:lnL>
                     <a:lnR w="9525" cap="flat" cmpd="sng" algn="ctr">
                       <a:solidFill>
-                        <a:srgbClr val="2B8245"/>
+                        <a:srgbClr val="43D66F"/>
                       </a:solidFill>
                       <a:prstDash val="solid"/>
                     </a:lnR>
                     <a:lnT w="9525" cap="flat" cmpd="sng" algn="ctr">
                       <a:solidFill>
-                        <a:srgbClr val="2B8245"/>
+                        <a:srgbClr val="43D66F"/>
                       </a:solidFill>
                       <a:prstDash val="solid"/>
                     </a:lnT>
                     <a:lnB w="9525" cap="flat" cmpd="sng" algn="ctr">
                       <a:solidFill>
-                        <a:srgbClr val="2B8245"/>
+                        <a:srgbClr val="43D66F"/>
                       </a:solidFill>
                       <a:prstDash val="solid"/>
                     </a:lnB>
                     <a:solidFill>
-                      <a:srgbClr val="2B8245"/>
+                      <a:srgbClr val="43D66F"/>
                     </a:solidFill>
                   </a:tcPr>
                 </a:tc>
@@ -3678,30 +3678,30 @@
                   <a:tcPr anchor="ctr" marL="73152" marR="73152">
                     <a:lnL w="9525" cap="flat" cmpd="sng" algn="ctr">
                       <a:solidFill>
-                        <a:srgbClr val="2B8245"/>
+                        <a:srgbClr val="43D66F"/>
                       </a:solidFill>
                       <a:prstDash val="solid"/>
                     </a:lnL>
                     <a:lnR w="9525" cap="flat" cmpd="sng" algn="ctr">
                       <a:solidFill>
-                        <a:srgbClr val="2B8245"/>
+                        <a:srgbClr val="43D66F"/>
                       </a:solidFill>
                       <a:prstDash val="solid"/>
                     </a:lnR>
                     <a:lnT w="9525" cap="flat" cmpd="sng" algn="ctr">
                       <a:solidFill>
-                        <a:srgbClr val="2B8245"/>
+                        <a:srgbClr val="43D66F"/>
                       </a:solidFill>
                       <a:prstDash val="solid"/>
                     </a:lnT>
                     <a:lnB w="9525" cap="flat" cmpd="sng" algn="ctr">
                       <a:solidFill>
-                        <a:srgbClr val="2B8245"/>
+                        <a:srgbClr val="43D66F"/>
                       </a:solidFill>
                       <a:prstDash val="solid"/>
                     </a:lnB>
                     <a:solidFill>
-                      <a:srgbClr val="2B8245"/>
+                      <a:srgbClr val="43D66F"/>
                     </a:solidFill>
                   </a:tcPr>
                 </a:tc>
@@ -3724,30 +3724,30 @@
                   <a:tcPr anchor="ctr" marL="73152" marR="73152">
                     <a:lnL w="9525" cap="flat" cmpd="sng" algn="ctr">
                       <a:solidFill>
-                        <a:srgbClr val="2B8245"/>
+                        <a:srgbClr val="43D66F"/>
                       </a:solidFill>
                       <a:prstDash val="solid"/>
                     </a:lnL>
                     <a:lnR w="9525" cap="flat" cmpd="sng" algn="ctr">
                       <a:solidFill>
-                        <a:srgbClr val="2B8245"/>
+                        <a:srgbClr val="43D66F"/>
                       </a:solidFill>
                       <a:prstDash val="solid"/>
                     </a:lnR>
                     <a:lnT w="9525" cap="flat" cmpd="sng" algn="ctr">
                       <a:solidFill>
-                        <a:srgbClr val="2B8245"/>
+                        <a:srgbClr val="43D66F"/>
                       </a:solidFill>
                       <a:prstDash val="solid"/>
                     </a:lnT>
                     <a:lnB w="9525" cap="flat" cmpd="sng" algn="ctr">
                       <a:solidFill>
-                        <a:srgbClr val="2B8245"/>
+                        <a:srgbClr val="43D66F"/>
                       </a:solidFill>
                       <a:prstDash val="solid"/>
                     </a:lnB>
                     <a:solidFill>
-                      <a:srgbClr val="2B8245"/>
+                      <a:srgbClr val="43D66F"/>
                     </a:solidFill>
                   </a:tcPr>
                 </a:tc>
@@ -3762,7 +3762,7 @@
                       <a:r>
                         <a:rPr sz="1600" b="1">
                           <a:solidFill>
-                            <a:srgbClr val="143D21"/>
+                            <a:srgbClr val="1D7236"/>
                           </a:solidFill>
                         </a:rPr>
                         <a:t>이름</a:t>
@@ -3772,30 +3772,30 @@
                   <a:tcPr anchor="ctr" marL="73152" marR="73152">
                     <a:lnL w="9525" cap="flat" cmpd="sng" algn="ctr">
                       <a:solidFill>
-                        <a:srgbClr val="D0F1DA"/>
+                        <a:srgbClr val="D4F7DE"/>
                       </a:solidFill>
                       <a:prstDash val="solid"/>
                     </a:lnL>
                     <a:lnR w="9525" cap="flat" cmpd="sng" algn="ctr">
                       <a:solidFill>
-                        <a:srgbClr val="D0F1DA"/>
+                        <a:srgbClr val="D4F7DE"/>
                       </a:solidFill>
                       <a:prstDash val="solid"/>
                     </a:lnR>
                     <a:lnT w="9525" cap="flat" cmpd="sng" algn="ctr">
                       <a:solidFill>
-                        <a:srgbClr val="D0F1DA"/>
+                        <a:srgbClr val="D4F7DE"/>
                       </a:solidFill>
                       <a:prstDash val="solid"/>
                     </a:lnT>
                     <a:lnB w="9525" cap="flat" cmpd="sng" algn="ctr">
                       <a:solidFill>
-                        <a:srgbClr val="D0F1DA"/>
+                        <a:srgbClr val="D4F7DE"/>
                       </a:solidFill>
                       <a:prstDash val="solid"/>
                     </a:lnB>
                     <a:solidFill>
-                      <a:srgbClr val="D0F1DA"/>
+                      <a:srgbClr val="D4F7DE"/>
                     </a:solidFill>
                   </a:tcPr>
                 </a:tc>
@@ -3818,25 +3818,25 @@
                   <a:tcPr anchor="ctr" marL="73152" marR="73152">
                     <a:lnL w="9525" cap="flat" cmpd="sng" algn="ctr">
                       <a:solidFill>
-                        <a:srgbClr val="D0F1DA"/>
+                        <a:srgbClr val="D4F7DE"/>
                       </a:solidFill>
                       <a:prstDash val="solid"/>
                     </a:lnL>
                     <a:lnR w="9525" cap="flat" cmpd="sng" algn="ctr">
                       <a:solidFill>
-                        <a:srgbClr val="D0F1DA"/>
+                        <a:srgbClr val="D4F7DE"/>
                       </a:solidFill>
                       <a:prstDash val="solid"/>
                     </a:lnR>
                     <a:lnT w="9525" cap="flat" cmpd="sng" algn="ctr">
                       <a:solidFill>
-                        <a:srgbClr val="D0F1DA"/>
+                        <a:srgbClr val="D4F7DE"/>
                       </a:solidFill>
                       <a:prstDash val="solid"/>
                     </a:lnT>
                     <a:lnB w="9525" cap="flat" cmpd="sng" algn="ctr">
                       <a:solidFill>
-                        <a:srgbClr val="D0F1DA"/>
+                        <a:srgbClr val="D4F7DE"/>
                       </a:solidFill>
                       <a:prstDash val="solid"/>
                     </a:lnB>
@@ -3864,25 +3864,25 @@
                   <a:tcPr anchor="ctr" marL="73152" marR="73152">
                     <a:lnL w="9525" cap="flat" cmpd="sng" algn="ctr">
                       <a:solidFill>
-                        <a:srgbClr val="D0F1DA"/>
+                        <a:srgbClr val="D4F7DE"/>
                       </a:solidFill>
                       <a:prstDash val="solid"/>
                     </a:lnL>
                     <a:lnR w="9525" cap="flat" cmpd="sng" algn="ctr">
                       <a:solidFill>
-                        <a:srgbClr val="D0F1DA"/>
+                        <a:srgbClr val="D4F7DE"/>
                       </a:solidFill>
                       <a:prstDash val="solid"/>
                     </a:lnR>
                     <a:lnT w="9525" cap="flat" cmpd="sng" algn="ctr">
                       <a:solidFill>
-                        <a:srgbClr val="D0F1DA"/>
+                        <a:srgbClr val="D4F7DE"/>
                       </a:solidFill>
                       <a:prstDash val="solid"/>
                     </a:lnT>
                     <a:lnB w="9525" cap="flat" cmpd="sng" algn="ctr">
                       <a:solidFill>
-                        <a:srgbClr val="D0F1DA"/>
+                        <a:srgbClr val="D4F7DE"/>
                       </a:solidFill>
                       <a:prstDash val="solid"/>
                     </a:lnB>
@@ -3910,25 +3910,25 @@
                   <a:tcPr anchor="ctr" marL="73152" marR="73152">
                     <a:lnL w="9525" cap="flat" cmpd="sng" algn="ctr">
                       <a:solidFill>
-                        <a:srgbClr val="D0F1DA"/>
+                        <a:srgbClr val="D4F7DE"/>
                       </a:solidFill>
                       <a:prstDash val="solid"/>
                     </a:lnL>
                     <a:lnR w="9525" cap="flat" cmpd="sng" algn="ctr">
                       <a:solidFill>
-                        <a:srgbClr val="D0F1DA"/>
+                        <a:srgbClr val="D4F7DE"/>
                       </a:solidFill>
                       <a:prstDash val="solid"/>
                     </a:lnR>
                     <a:lnT w="9525" cap="flat" cmpd="sng" algn="ctr">
                       <a:solidFill>
-                        <a:srgbClr val="D0F1DA"/>
+                        <a:srgbClr val="D4F7DE"/>
                       </a:solidFill>
                       <a:prstDash val="solid"/>
                     </a:lnT>
                     <a:lnB w="9525" cap="flat" cmpd="sng" algn="ctr">
                       <a:solidFill>
-                        <a:srgbClr val="D0F1DA"/>
+                        <a:srgbClr val="D4F7DE"/>
                       </a:solidFill>
                       <a:prstDash val="solid"/>
                     </a:lnB>
@@ -3948,7 +3948,7 @@
                       <a:r>
                         <a:rPr sz="1600" b="1">
                           <a:solidFill>
-                            <a:srgbClr val="143D21"/>
+                            <a:srgbClr val="1D7236"/>
                           </a:solidFill>
                         </a:rPr>
                         <a:t>나이</a:t>
@@ -3958,30 +3958,30 @@
                   <a:tcPr anchor="ctr" marL="73152" marR="73152">
                     <a:lnL w="9525" cap="flat" cmpd="sng" algn="ctr">
                       <a:solidFill>
-                        <a:srgbClr val="D0F1DA"/>
+                        <a:srgbClr val="D4F7DE"/>
                       </a:solidFill>
                       <a:prstDash val="solid"/>
                     </a:lnL>
                     <a:lnR w="9525" cap="flat" cmpd="sng" algn="ctr">
                       <a:solidFill>
-                        <a:srgbClr val="D0F1DA"/>
+                        <a:srgbClr val="D4F7DE"/>
                       </a:solidFill>
                       <a:prstDash val="solid"/>
                     </a:lnR>
                     <a:lnT w="9525" cap="flat" cmpd="sng" algn="ctr">
                       <a:solidFill>
-                        <a:srgbClr val="D0F1DA"/>
+                        <a:srgbClr val="D4F7DE"/>
                       </a:solidFill>
                       <a:prstDash val="solid"/>
                     </a:lnT>
                     <a:lnB w="9525" cap="flat" cmpd="sng" algn="ctr">
                       <a:solidFill>
-                        <a:srgbClr val="D0F1DA"/>
+                        <a:srgbClr val="D4F7DE"/>
                       </a:solidFill>
                       <a:prstDash val="solid"/>
                     </a:lnB>
                     <a:solidFill>
-                      <a:srgbClr val="D0F1DA"/>
+                      <a:srgbClr val="D4F7DE"/>
                     </a:solidFill>
                   </a:tcPr>
                 </a:tc>
@@ -4004,30 +4004,30 @@
                   <a:tcPr anchor="ctr" marL="73152" marR="73152">
                     <a:lnL w="9525" cap="flat" cmpd="sng" algn="ctr">
                       <a:solidFill>
-                        <a:srgbClr val="D0F1DA"/>
+                        <a:srgbClr val="D4F7DE"/>
                       </a:solidFill>
                       <a:prstDash val="solid"/>
                     </a:lnL>
                     <a:lnR w="9525" cap="flat" cmpd="sng" algn="ctr">
                       <a:solidFill>
-                        <a:srgbClr val="D0F1DA"/>
+                        <a:srgbClr val="D4F7DE"/>
                       </a:solidFill>
                       <a:prstDash val="solid"/>
                     </a:lnR>
                     <a:lnT w="9525" cap="flat" cmpd="sng" algn="ctr">
                       <a:solidFill>
-                        <a:srgbClr val="D0F1DA"/>
+                        <a:srgbClr val="D4F7DE"/>
                       </a:solidFill>
                       <a:prstDash val="solid"/>
                     </a:lnT>
                     <a:lnB w="9525" cap="flat" cmpd="sng" algn="ctr">
                       <a:solidFill>
-                        <a:srgbClr val="D0F1DA"/>
+                        <a:srgbClr val="D4F7DE"/>
                       </a:solidFill>
                       <a:prstDash val="solid"/>
                     </a:lnB>
                     <a:solidFill>
-                      <a:srgbClr val="F0FAF3"/>
+                      <a:srgbClr val="F3FCF6"/>
                     </a:solidFill>
                   </a:tcPr>
                 </a:tc>
@@ -4050,30 +4050,30 @@
                   <a:tcPr anchor="ctr" marL="73152" marR="73152">
                     <a:lnL w="9525" cap="flat" cmpd="sng" algn="ctr">
                       <a:solidFill>
-                        <a:srgbClr val="D0F1DA"/>
+                        <a:srgbClr val="D4F7DE"/>
                       </a:solidFill>
                       <a:prstDash val="solid"/>
                     </a:lnL>
                     <a:lnR w="9525" cap="flat" cmpd="sng" algn="ctr">
                       <a:solidFill>
-                        <a:srgbClr val="D0F1DA"/>
+                        <a:srgbClr val="D4F7DE"/>
                       </a:solidFill>
                       <a:prstDash val="solid"/>
                     </a:lnR>
                     <a:lnT w="9525" cap="flat" cmpd="sng" algn="ctr">
                       <a:solidFill>
-                        <a:srgbClr val="D0F1DA"/>
+                        <a:srgbClr val="D4F7DE"/>
                       </a:solidFill>
                       <a:prstDash val="solid"/>
                     </a:lnT>
                     <a:lnB w="9525" cap="flat" cmpd="sng" algn="ctr">
                       <a:solidFill>
-                        <a:srgbClr val="D0F1DA"/>
+                        <a:srgbClr val="D4F7DE"/>
                       </a:solidFill>
                       <a:prstDash val="solid"/>
                     </a:lnB>
                     <a:solidFill>
-                      <a:srgbClr val="F0FAF3"/>
+                      <a:srgbClr val="F3FCF6"/>
                     </a:solidFill>
                   </a:tcPr>
                 </a:tc>
@@ -4096,30 +4096,30 @@
                   <a:tcPr anchor="ctr" marL="73152" marR="73152">
                     <a:lnL w="9525" cap="flat" cmpd="sng" algn="ctr">
                       <a:solidFill>
-                        <a:srgbClr val="D0F1DA"/>
+                        <a:srgbClr val="D4F7DE"/>
                       </a:solidFill>
                       <a:prstDash val="solid"/>
                     </a:lnL>
                     <a:lnR w="9525" cap="flat" cmpd="sng" algn="ctr">
                       <a:solidFill>
-                        <a:srgbClr val="D0F1DA"/>
+                        <a:srgbClr val="D4F7DE"/>
                       </a:solidFill>
                       <a:prstDash val="solid"/>
                     </a:lnR>
                     <a:lnT w="9525" cap="flat" cmpd="sng" algn="ctr">
                       <a:solidFill>
-                        <a:srgbClr val="D0F1DA"/>
+                        <a:srgbClr val="D4F7DE"/>
                       </a:solidFill>
                       <a:prstDash val="solid"/>
                     </a:lnT>
                     <a:lnB w="9525" cap="flat" cmpd="sng" algn="ctr">
                       <a:solidFill>
-                        <a:srgbClr val="D0F1DA"/>
+                        <a:srgbClr val="D4F7DE"/>
                       </a:solidFill>
                       <a:prstDash val="solid"/>
                     </a:lnB>
                     <a:solidFill>
-                      <a:srgbClr val="F0FAF3"/>
+                      <a:srgbClr val="F3FCF6"/>
                     </a:solidFill>
                   </a:tcPr>
                 </a:tc>
@@ -4134,7 +4134,7 @@
                       <a:r>
                         <a:rPr sz="1600" b="1">
                           <a:solidFill>
-                            <a:srgbClr val="143D21"/>
+                            <a:srgbClr val="1D7236"/>
                           </a:solidFill>
                         </a:rPr>
                         <a:t>직업·학교</a:t>
@@ -4144,30 +4144,30 @@
                   <a:tcPr anchor="ctr" marL="73152" marR="73152">
                     <a:lnL w="9525" cap="flat" cmpd="sng" algn="ctr">
                       <a:solidFill>
-                        <a:srgbClr val="D0F1DA"/>
+                        <a:srgbClr val="D4F7DE"/>
                       </a:solidFill>
                       <a:prstDash val="solid"/>
                     </a:lnL>
                     <a:lnR w="9525" cap="flat" cmpd="sng" algn="ctr">
                       <a:solidFill>
-                        <a:srgbClr val="D0F1DA"/>
+                        <a:srgbClr val="D4F7DE"/>
                       </a:solidFill>
                       <a:prstDash val="solid"/>
                     </a:lnR>
                     <a:lnT w="9525" cap="flat" cmpd="sng" algn="ctr">
                       <a:solidFill>
-                        <a:srgbClr val="D0F1DA"/>
+                        <a:srgbClr val="D4F7DE"/>
                       </a:solidFill>
                       <a:prstDash val="solid"/>
                     </a:lnT>
                     <a:lnB w="9525" cap="flat" cmpd="sng" algn="ctr">
                       <a:solidFill>
-                        <a:srgbClr val="D0F1DA"/>
+                        <a:srgbClr val="D4F7DE"/>
                       </a:solidFill>
                       <a:prstDash val="solid"/>
                     </a:lnB>
                     <a:solidFill>
-                      <a:srgbClr val="D0F1DA"/>
+                      <a:srgbClr val="D4F7DE"/>
                     </a:solidFill>
                   </a:tcPr>
                 </a:tc>
@@ -4190,25 +4190,25 @@
                   <a:tcPr anchor="ctr" marL="73152" marR="73152">
                     <a:lnL w="9525" cap="flat" cmpd="sng" algn="ctr">
                       <a:solidFill>
-                        <a:srgbClr val="D0F1DA"/>
+                        <a:srgbClr val="D4F7DE"/>
                       </a:solidFill>
                       <a:prstDash val="solid"/>
                     </a:lnL>
                     <a:lnR w="9525" cap="flat" cmpd="sng" algn="ctr">
                       <a:solidFill>
-                        <a:srgbClr val="D0F1DA"/>
+                        <a:srgbClr val="D4F7DE"/>
                       </a:solidFill>
                       <a:prstDash val="solid"/>
                     </a:lnR>
                     <a:lnT w="9525" cap="flat" cmpd="sng" algn="ctr">
                       <a:solidFill>
-                        <a:srgbClr val="D0F1DA"/>
+                        <a:srgbClr val="D4F7DE"/>
                       </a:solidFill>
                       <a:prstDash val="solid"/>
                     </a:lnT>
                     <a:lnB w="9525" cap="flat" cmpd="sng" algn="ctr">
                       <a:solidFill>
-                        <a:srgbClr val="D0F1DA"/>
+                        <a:srgbClr val="D4F7DE"/>
                       </a:solidFill>
                       <a:prstDash val="solid"/>
                     </a:lnB>
@@ -4236,25 +4236,25 @@
                   <a:tcPr anchor="ctr" marL="73152" marR="73152">
                     <a:lnL w="9525" cap="flat" cmpd="sng" algn="ctr">
                       <a:solidFill>
-                        <a:srgbClr val="D0F1DA"/>
+                        <a:srgbClr val="D4F7DE"/>
                       </a:solidFill>
                       <a:prstDash val="solid"/>
                     </a:lnL>
                     <a:lnR w="9525" cap="flat" cmpd="sng" algn="ctr">
                       <a:solidFill>
-                        <a:srgbClr val="D0F1DA"/>
+                        <a:srgbClr val="D4F7DE"/>
                       </a:solidFill>
                       <a:prstDash val="solid"/>
                     </a:lnR>
                     <a:lnT w="9525" cap="flat" cmpd="sng" algn="ctr">
                       <a:solidFill>
-                        <a:srgbClr val="D0F1DA"/>
+                        <a:srgbClr val="D4F7DE"/>
                       </a:solidFill>
                       <a:prstDash val="solid"/>
                     </a:lnT>
                     <a:lnB w="9525" cap="flat" cmpd="sng" algn="ctr">
                       <a:solidFill>
-                        <a:srgbClr val="D0F1DA"/>
+                        <a:srgbClr val="D4F7DE"/>
                       </a:solidFill>
                       <a:prstDash val="solid"/>
                     </a:lnB>
@@ -4282,25 +4282,25 @@
                   <a:tcPr anchor="ctr" marL="73152" marR="73152">
                     <a:lnL w="9525" cap="flat" cmpd="sng" algn="ctr">
                       <a:solidFill>
-                        <a:srgbClr val="D0F1DA"/>
+                        <a:srgbClr val="D4F7DE"/>
                       </a:solidFill>
                       <a:prstDash val="solid"/>
                     </a:lnL>
                     <a:lnR w="9525" cap="flat" cmpd="sng" algn="ctr">
                       <a:solidFill>
-                        <a:srgbClr val="D0F1DA"/>
+                        <a:srgbClr val="D4F7DE"/>
                       </a:solidFill>
                       <a:prstDash val="solid"/>
                     </a:lnR>
                     <a:lnT w="9525" cap="flat" cmpd="sng" algn="ctr">
                       <a:solidFill>
-                        <a:srgbClr val="D0F1DA"/>
+                        <a:srgbClr val="D4F7DE"/>
                       </a:solidFill>
                       <a:prstDash val="solid"/>
                     </a:lnT>
                     <a:lnB w="9525" cap="flat" cmpd="sng" algn="ctr">
                       <a:solidFill>
-                        <a:srgbClr val="D0F1DA"/>
+                        <a:srgbClr val="D4F7DE"/>
                       </a:solidFill>
                       <a:prstDash val="solid"/>
                     </a:lnB>
@@ -4320,7 +4320,7 @@
                       <a:r>
                         <a:rPr sz="1600" b="1">
                           <a:solidFill>
-                            <a:srgbClr val="143D21"/>
+                            <a:srgbClr val="1D7236"/>
                           </a:solidFill>
                         </a:rPr>
                         <a:t>메모</a:t>
@@ -4330,30 +4330,30 @@
                   <a:tcPr anchor="ctr" marL="73152" marR="73152">
                     <a:lnL w="9525" cap="flat" cmpd="sng" algn="ctr">
                       <a:solidFill>
-                        <a:srgbClr val="D0F1DA"/>
+                        <a:srgbClr val="D4F7DE"/>
                       </a:solidFill>
                       <a:prstDash val="solid"/>
                     </a:lnL>
                     <a:lnR w="9525" cap="flat" cmpd="sng" algn="ctr">
                       <a:solidFill>
-                        <a:srgbClr val="D0F1DA"/>
+                        <a:srgbClr val="D4F7DE"/>
                       </a:solidFill>
                       <a:prstDash val="solid"/>
                     </a:lnR>
                     <a:lnT w="9525" cap="flat" cmpd="sng" algn="ctr">
                       <a:solidFill>
-                        <a:srgbClr val="D0F1DA"/>
+                        <a:srgbClr val="D4F7DE"/>
                       </a:solidFill>
                       <a:prstDash val="solid"/>
                     </a:lnT>
                     <a:lnB w="9525" cap="flat" cmpd="sng" algn="ctr">
                       <a:solidFill>
-                        <a:srgbClr val="D0F1DA"/>
+                        <a:srgbClr val="D4F7DE"/>
                       </a:solidFill>
                       <a:prstDash val="solid"/>
                     </a:lnB>
                     <a:solidFill>
-                      <a:srgbClr val="D0F1DA"/>
+                      <a:srgbClr val="D4F7DE"/>
                     </a:solidFill>
                   </a:tcPr>
                 </a:tc>
@@ -4376,30 +4376,30 @@
                   <a:tcPr anchor="ctr" marL="73152" marR="73152">
                     <a:lnL w="9525" cap="flat" cmpd="sng" algn="ctr">
                       <a:solidFill>
-                        <a:srgbClr val="D0F1DA"/>
+                        <a:srgbClr val="D4F7DE"/>
                       </a:solidFill>
                       <a:prstDash val="solid"/>
                     </a:lnL>
                     <a:lnR w="9525" cap="flat" cmpd="sng" algn="ctr">
                       <a:solidFill>
-                        <a:srgbClr val="D0F1DA"/>
+                        <a:srgbClr val="D4F7DE"/>
                       </a:solidFill>
                       <a:prstDash val="solid"/>
                     </a:lnR>
                     <a:lnT w="9525" cap="flat" cmpd="sng" algn="ctr">
                       <a:solidFill>
-                        <a:srgbClr val="D0F1DA"/>
+                        <a:srgbClr val="D4F7DE"/>
                       </a:solidFill>
                       <a:prstDash val="solid"/>
                     </a:lnT>
                     <a:lnB w="9525" cap="flat" cmpd="sng" algn="ctr">
                       <a:solidFill>
-                        <a:srgbClr val="D0F1DA"/>
+                        <a:srgbClr val="D4F7DE"/>
                       </a:solidFill>
                       <a:prstDash val="solid"/>
                     </a:lnB>
                     <a:solidFill>
-                      <a:srgbClr val="F0FAF3"/>
+                      <a:srgbClr val="F3FCF6"/>
                     </a:solidFill>
                   </a:tcPr>
                 </a:tc>
@@ -4422,30 +4422,30 @@
                   <a:tcPr anchor="ctr" marL="73152" marR="73152">
                     <a:lnL w="9525" cap="flat" cmpd="sng" algn="ctr">
                       <a:solidFill>
-                        <a:srgbClr val="D0F1DA"/>
+                        <a:srgbClr val="D4F7DE"/>
                       </a:solidFill>
                       <a:prstDash val="solid"/>
                     </a:lnL>
                     <a:lnR w="9525" cap="flat" cmpd="sng" algn="ctr">
                       <a:solidFill>
-                        <a:srgbClr val="D0F1DA"/>
+                        <a:srgbClr val="D4F7DE"/>
                       </a:solidFill>
                       <a:prstDash val="solid"/>
                     </a:lnR>
                     <a:lnT w="9525" cap="flat" cmpd="sng" algn="ctr">
                       <a:solidFill>
-                        <a:srgbClr val="D0F1DA"/>
+                        <a:srgbClr val="D4F7DE"/>
                       </a:solidFill>
                       <a:prstDash val="solid"/>
                     </a:lnT>
                     <a:lnB w="9525" cap="flat" cmpd="sng" algn="ctr">
                       <a:solidFill>
-                        <a:srgbClr val="D0F1DA"/>
+                        <a:srgbClr val="D4F7DE"/>
                       </a:solidFill>
                       <a:prstDash val="solid"/>
                     </a:lnB>
                     <a:solidFill>
-                      <a:srgbClr val="F0FAF3"/>
+                      <a:srgbClr val="F3FCF6"/>
                     </a:solidFill>
                   </a:tcPr>
                 </a:tc>
@@ -4468,30 +4468,30 @@
                   <a:tcPr anchor="ctr" marL="73152" marR="73152">
                     <a:lnL w="9525" cap="flat" cmpd="sng" algn="ctr">
                       <a:solidFill>
-                        <a:srgbClr val="D0F1DA"/>
+                        <a:srgbClr val="D4F7DE"/>
                       </a:solidFill>
                       <a:prstDash val="solid"/>
                     </a:lnL>
                     <a:lnR w="9525" cap="flat" cmpd="sng" algn="ctr">
                       <a:solidFill>
-                        <a:srgbClr val="D0F1DA"/>
+                        <a:srgbClr val="D4F7DE"/>
                       </a:solidFill>
                       <a:prstDash val="solid"/>
                     </a:lnR>
                     <a:lnT w="9525" cap="flat" cmpd="sng" algn="ctr">
                       <a:solidFill>
-                        <a:srgbClr val="D0F1DA"/>
+                        <a:srgbClr val="D4F7DE"/>
                       </a:solidFill>
                       <a:prstDash val="solid"/>
                     </a:lnT>
                     <a:lnB w="9525" cap="flat" cmpd="sng" algn="ctr">
                       <a:solidFill>
-                        <a:srgbClr val="D0F1DA"/>
+                        <a:srgbClr val="D4F7DE"/>
                       </a:solidFill>
                       <a:prstDash val="solid"/>
                     </a:lnB>
                     <a:solidFill>
-                      <a:srgbClr val="F0FAF3"/>
+                      <a:srgbClr val="F3FCF6"/>
                     </a:solidFill>
                   </a:tcPr>
                 </a:tc>
@@ -4514,7 +4514,7 @@
     <p:bg>
       <p:bgPr>
         <a:solidFill>
-          <a:srgbClr val="D0F1DA"/>
+          <a:srgbClr val="D4F7DE"/>
         </a:solidFill>
         <a:effectLst/>
       </p:bgPr>
@@ -4545,7 +4545,7 @@
           </a:solidFill>
           <a:ln w="25400">
             <a:solidFill>
-              <a:srgbClr val="2B8245"/>
+              <a:srgbClr val="43D66F"/>
             </a:solidFill>
             <a:prstDash val="dash"/>
           </a:ln>
@@ -4588,7 +4588,7 @@
             <a:r>
               <a:rPr sz="3000" b="1" i="0">
                 <a:solidFill>
-                  <a:srgbClr val="143D21"/>
+                  <a:srgbClr val="1D7236"/>
                 </a:solidFill>
               </a:rPr>
               <a:t>가입한 보험 목록</a:t>
@@ -4641,30 +4641,30 @@
                   <a:tcPr anchor="ctr" marL="73152" marR="73152">
                     <a:lnL w="9525" cap="flat" cmpd="sng" algn="ctr">
                       <a:solidFill>
-                        <a:srgbClr val="2B8245"/>
+                        <a:srgbClr val="43D66F"/>
                       </a:solidFill>
                       <a:prstDash val="solid"/>
                     </a:lnL>
                     <a:lnR w="9525" cap="flat" cmpd="sng" algn="ctr">
                       <a:solidFill>
-                        <a:srgbClr val="2B8245"/>
+                        <a:srgbClr val="43D66F"/>
                       </a:solidFill>
                       <a:prstDash val="solid"/>
                     </a:lnR>
                     <a:lnT w="9525" cap="flat" cmpd="sng" algn="ctr">
                       <a:solidFill>
-                        <a:srgbClr val="2B8245"/>
+                        <a:srgbClr val="43D66F"/>
                       </a:solidFill>
                       <a:prstDash val="solid"/>
                     </a:lnT>
                     <a:lnB w="9525" cap="flat" cmpd="sng" algn="ctr">
                       <a:solidFill>
-                        <a:srgbClr val="2B8245"/>
+                        <a:srgbClr val="43D66F"/>
                       </a:solidFill>
                       <a:prstDash val="solid"/>
                     </a:lnB>
                     <a:solidFill>
-                      <a:srgbClr val="2B8245"/>
+                      <a:srgbClr val="43D66F"/>
                     </a:solidFill>
                   </a:tcPr>
                 </a:tc>
@@ -4687,30 +4687,30 @@
                   <a:tcPr anchor="ctr" marL="73152" marR="73152">
                     <a:lnL w="9525" cap="flat" cmpd="sng" algn="ctr">
                       <a:solidFill>
-                        <a:srgbClr val="2B8245"/>
+                        <a:srgbClr val="43D66F"/>
                       </a:solidFill>
                       <a:prstDash val="solid"/>
                     </a:lnL>
                     <a:lnR w="9525" cap="flat" cmpd="sng" algn="ctr">
                       <a:solidFill>
-                        <a:srgbClr val="2B8245"/>
+                        <a:srgbClr val="43D66F"/>
                       </a:solidFill>
                       <a:prstDash val="solid"/>
                     </a:lnR>
                     <a:lnT w="9525" cap="flat" cmpd="sng" algn="ctr">
                       <a:solidFill>
-                        <a:srgbClr val="2B8245"/>
+                        <a:srgbClr val="43D66F"/>
                       </a:solidFill>
                       <a:prstDash val="solid"/>
                     </a:lnT>
                     <a:lnB w="9525" cap="flat" cmpd="sng" algn="ctr">
                       <a:solidFill>
-                        <a:srgbClr val="2B8245"/>
+                        <a:srgbClr val="43D66F"/>
                       </a:solidFill>
                       <a:prstDash val="solid"/>
                     </a:lnB>
                     <a:solidFill>
-                      <a:srgbClr val="2B8245"/>
+                      <a:srgbClr val="43D66F"/>
                     </a:solidFill>
                   </a:tcPr>
                 </a:tc>
@@ -4733,30 +4733,30 @@
                   <a:tcPr anchor="ctr" marL="73152" marR="73152">
                     <a:lnL w="9525" cap="flat" cmpd="sng" algn="ctr">
                       <a:solidFill>
-                        <a:srgbClr val="2B8245"/>
+                        <a:srgbClr val="43D66F"/>
                       </a:solidFill>
                       <a:prstDash val="solid"/>
                     </a:lnL>
                     <a:lnR w="9525" cap="flat" cmpd="sng" algn="ctr">
                       <a:solidFill>
-                        <a:srgbClr val="2B8245"/>
+                        <a:srgbClr val="43D66F"/>
                       </a:solidFill>
                       <a:prstDash val="solid"/>
                     </a:lnR>
                     <a:lnT w="9525" cap="flat" cmpd="sng" algn="ctr">
                       <a:solidFill>
-                        <a:srgbClr val="2B8245"/>
+                        <a:srgbClr val="43D66F"/>
                       </a:solidFill>
                       <a:prstDash val="solid"/>
                     </a:lnT>
                     <a:lnB w="9525" cap="flat" cmpd="sng" algn="ctr">
                       <a:solidFill>
-                        <a:srgbClr val="2B8245"/>
+                        <a:srgbClr val="43D66F"/>
                       </a:solidFill>
                       <a:prstDash val="solid"/>
                     </a:lnB>
                     <a:solidFill>
-                      <a:srgbClr val="2B8245"/>
+                      <a:srgbClr val="43D66F"/>
                     </a:solidFill>
                   </a:tcPr>
                 </a:tc>
@@ -4779,30 +4779,30 @@
                   <a:tcPr anchor="ctr" marL="73152" marR="73152">
                     <a:lnL w="9525" cap="flat" cmpd="sng" algn="ctr">
                       <a:solidFill>
-                        <a:srgbClr val="2B8245"/>
+                        <a:srgbClr val="43D66F"/>
                       </a:solidFill>
                       <a:prstDash val="solid"/>
                     </a:lnL>
                     <a:lnR w="9525" cap="flat" cmpd="sng" algn="ctr">
                       <a:solidFill>
-                        <a:srgbClr val="2B8245"/>
+                        <a:srgbClr val="43D66F"/>
                       </a:solidFill>
                       <a:prstDash val="solid"/>
                     </a:lnR>
                     <a:lnT w="9525" cap="flat" cmpd="sng" algn="ctr">
                       <a:solidFill>
-                        <a:srgbClr val="2B8245"/>
+                        <a:srgbClr val="43D66F"/>
                       </a:solidFill>
                       <a:prstDash val="solid"/>
                     </a:lnT>
                     <a:lnB w="9525" cap="flat" cmpd="sng" algn="ctr">
                       <a:solidFill>
-                        <a:srgbClr val="2B8245"/>
+                        <a:srgbClr val="43D66F"/>
                       </a:solidFill>
                       <a:prstDash val="solid"/>
                     </a:lnB>
                     <a:solidFill>
-                      <a:srgbClr val="2B8245"/>
+                      <a:srgbClr val="43D66F"/>
                     </a:solidFill>
                   </a:tcPr>
                 </a:tc>
@@ -4825,30 +4825,30 @@
                   <a:tcPr anchor="ctr" marL="73152" marR="73152">
                     <a:lnL w="9525" cap="flat" cmpd="sng" algn="ctr">
                       <a:solidFill>
-                        <a:srgbClr val="2B8245"/>
+                        <a:srgbClr val="43D66F"/>
                       </a:solidFill>
                       <a:prstDash val="solid"/>
                     </a:lnL>
                     <a:lnR w="9525" cap="flat" cmpd="sng" algn="ctr">
                       <a:solidFill>
-                        <a:srgbClr val="2B8245"/>
+                        <a:srgbClr val="43D66F"/>
                       </a:solidFill>
                       <a:prstDash val="solid"/>
                     </a:lnR>
                     <a:lnT w="9525" cap="flat" cmpd="sng" algn="ctr">
                       <a:solidFill>
-                        <a:srgbClr val="2B8245"/>
+                        <a:srgbClr val="43D66F"/>
                       </a:solidFill>
                       <a:prstDash val="solid"/>
                     </a:lnT>
                     <a:lnB w="9525" cap="flat" cmpd="sng" algn="ctr">
                       <a:solidFill>
-                        <a:srgbClr val="2B8245"/>
+                        <a:srgbClr val="43D66F"/>
                       </a:solidFill>
                       <a:prstDash val="solid"/>
                     </a:lnB>
                     <a:solidFill>
-                      <a:srgbClr val="2B8245"/>
+                      <a:srgbClr val="43D66F"/>
                     </a:solidFill>
                   </a:tcPr>
                 </a:tc>
@@ -4873,25 +4873,25 @@
                   <a:tcPr anchor="ctr" marL="73152" marR="73152">
                     <a:lnL w="9525" cap="flat" cmpd="sng" algn="ctr">
                       <a:solidFill>
-                        <a:srgbClr val="D0F1DA"/>
+                        <a:srgbClr val="D4F7DE"/>
                       </a:solidFill>
                       <a:prstDash val="solid"/>
                     </a:lnL>
                     <a:lnR w="9525" cap="flat" cmpd="sng" algn="ctr">
                       <a:solidFill>
-                        <a:srgbClr val="D0F1DA"/>
+                        <a:srgbClr val="D4F7DE"/>
                       </a:solidFill>
                       <a:prstDash val="solid"/>
                     </a:lnR>
                     <a:lnT w="9525" cap="flat" cmpd="sng" algn="ctr">
                       <a:solidFill>
-                        <a:srgbClr val="D0F1DA"/>
+                        <a:srgbClr val="D4F7DE"/>
                       </a:solidFill>
                       <a:prstDash val="solid"/>
                     </a:lnT>
                     <a:lnB w="9525" cap="flat" cmpd="sng" algn="ctr">
                       <a:solidFill>
-                        <a:srgbClr val="D0F1DA"/>
+                        <a:srgbClr val="D4F7DE"/>
                       </a:solidFill>
                       <a:prstDash val="solid"/>
                     </a:lnB>
@@ -4919,25 +4919,25 @@
                   <a:tcPr anchor="ctr" marL="73152" marR="73152">
                     <a:lnL w="9525" cap="flat" cmpd="sng" algn="ctr">
                       <a:solidFill>
-                        <a:srgbClr val="D0F1DA"/>
+                        <a:srgbClr val="D4F7DE"/>
                       </a:solidFill>
                       <a:prstDash val="solid"/>
                     </a:lnL>
                     <a:lnR w="9525" cap="flat" cmpd="sng" algn="ctr">
                       <a:solidFill>
-                        <a:srgbClr val="D0F1DA"/>
+                        <a:srgbClr val="D4F7DE"/>
                       </a:solidFill>
                       <a:prstDash val="solid"/>
                     </a:lnR>
                     <a:lnT w="9525" cap="flat" cmpd="sng" algn="ctr">
                       <a:solidFill>
-                        <a:srgbClr val="D0F1DA"/>
+                        <a:srgbClr val="D4F7DE"/>
                       </a:solidFill>
                       <a:prstDash val="solid"/>
                     </a:lnT>
                     <a:lnB w="9525" cap="flat" cmpd="sng" algn="ctr">
                       <a:solidFill>
-                        <a:srgbClr val="D0F1DA"/>
+                        <a:srgbClr val="D4F7DE"/>
                       </a:solidFill>
                       <a:prstDash val="solid"/>
                     </a:lnB>
@@ -4965,25 +4965,25 @@
                   <a:tcPr anchor="ctr" marL="73152" marR="73152">
                     <a:lnL w="9525" cap="flat" cmpd="sng" algn="ctr">
                       <a:solidFill>
-                        <a:srgbClr val="D0F1DA"/>
+                        <a:srgbClr val="D4F7DE"/>
                       </a:solidFill>
                       <a:prstDash val="solid"/>
                     </a:lnL>
                     <a:lnR w="9525" cap="flat" cmpd="sng" algn="ctr">
                       <a:solidFill>
-                        <a:srgbClr val="D0F1DA"/>
+                        <a:srgbClr val="D4F7DE"/>
                       </a:solidFill>
                       <a:prstDash val="solid"/>
                     </a:lnR>
                     <a:lnT w="9525" cap="flat" cmpd="sng" algn="ctr">
                       <a:solidFill>
-                        <a:srgbClr val="D0F1DA"/>
+                        <a:srgbClr val="D4F7DE"/>
                       </a:solidFill>
                       <a:prstDash val="solid"/>
                     </a:lnT>
                     <a:lnB w="9525" cap="flat" cmpd="sng" algn="ctr">
                       <a:solidFill>
-                        <a:srgbClr val="D0F1DA"/>
+                        <a:srgbClr val="D4F7DE"/>
                       </a:solidFill>
                       <a:prstDash val="solid"/>
                     </a:lnB>
@@ -5011,25 +5011,25 @@
                   <a:tcPr anchor="ctr" marL="73152" marR="73152">
                     <a:lnL w="9525" cap="flat" cmpd="sng" algn="ctr">
                       <a:solidFill>
-                        <a:srgbClr val="D0F1DA"/>
+                        <a:srgbClr val="D4F7DE"/>
                       </a:solidFill>
                       <a:prstDash val="solid"/>
                     </a:lnL>
                     <a:lnR w="9525" cap="flat" cmpd="sng" algn="ctr">
                       <a:solidFill>
-                        <a:srgbClr val="D0F1DA"/>
+                        <a:srgbClr val="D4F7DE"/>
                       </a:solidFill>
                       <a:prstDash val="solid"/>
                     </a:lnR>
                     <a:lnT w="9525" cap="flat" cmpd="sng" algn="ctr">
                       <a:solidFill>
-                        <a:srgbClr val="D0F1DA"/>
+                        <a:srgbClr val="D4F7DE"/>
                       </a:solidFill>
                       <a:prstDash val="solid"/>
                     </a:lnT>
                     <a:lnB w="9525" cap="flat" cmpd="sng" algn="ctr">
                       <a:solidFill>
-                        <a:srgbClr val="D0F1DA"/>
+                        <a:srgbClr val="D4F7DE"/>
                       </a:solidFill>
                       <a:prstDash val="solid"/>
                     </a:lnB>
@@ -5057,25 +5057,25 @@
                   <a:tcPr anchor="ctr" marL="73152" marR="73152">
                     <a:lnL w="9525" cap="flat" cmpd="sng" algn="ctr">
                       <a:solidFill>
-                        <a:srgbClr val="D0F1DA"/>
+                        <a:srgbClr val="D4F7DE"/>
                       </a:solidFill>
                       <a:prstDash val="solid"/>
                     </a:lnL>
                     <a:lnR w="9525" cap="flat" cmpd="sng" algn="ctr">
                       <a:solidFill>
-                        <a:srgbClr val="D0F1DA"/>
+                        <a:srgbClr val="D4F7DE"/>
                       </a:solidFill>
                       <a:prstDash val="solid"/>
                     </a:lnR>
                     <a:lnT w="9525" cap="flat" cmpd="sng" algn="ctr">
                       <a:solidFill>
-                        <a:srgbClr val="D0F1DA"/>
+                        <a:srgbClr val="D4F7DE"/>
                       </a:solidFill>
                       <a:prstDash val="solid"/>
                     </a:lnT>
                     <a:lnB w="9525" cap="flat" cmpd="sng" algn="ctr">
                       <a:solidFill>
-                        <a:srgbClr val="D0F1DA"/>
+                        <a:srgbClr val="D4F7DE"/>
                       </a:solidFill>
                       <a:prstDash val="solid"/>
                     </a:lnB>
@@ -5105,30 +5105,30 @@
                   <a:tcPr anchor="ctr" marL="73152" marR="73152">
                     <a:lnL w="9525" cap="flat" cmpd="sng" algn="ctr">
                       <a:solidFill>
-                        <a:srgbClr val="D0F1DA"/>
+                        <a:srgbClr val="D4F7DE"/>
                       </a:solidFill>
                       <a:prstDash val="solid"/>
                     </a:lnL>
                     <a:lnR w="9525" cap="flat" cmpd="sng" algn="ctr">
                       <a:solidFill>
-                        <a:srgbClr val="D0F1DA"/>
+                        <a:srgbClr val="D4F7DE"/>
                       </a:solidFill>
                       <a:prstDash val="solid"/>
                     </a:lnR>
                     <a:lnT w="9525" cap="flat" cmpd="sng" algn="ctr">
                       <a:solidFill>
-                        <a:srgbClr val="D0F1DA"/>
+                        <a:srgbClr val="D4F7DE"/>
                       </a:solidFill>
                       <a:prstDash val="solid"/>
                     </a:lnT>
                     <a:lnB w="9525" cap="flat" cmpd="sng" algn="ctr">
                       <a:solidFill>
-                        <a:srgbClr val="D0F1DA"/>
+                        <a:srgbClr val="D4F7DE"/>
                       </a:solidFill>
                       <a:prstDash val="solid"/>
                     </a:lnB>
                     <a:solidFill>
-                      <a:srgbClr val="F0FAF3"/>
+                      <a:srgbClr val="F3FCF6"/>
                     </a:solidFill>
                   </a:tcPr>
                 </a:tc>
@@ -5151,30 +5151,30 @@
                   <a:tcPr anchor="ctr" marL="73152" marR="73152">
                     <a:lnL w="9525" cap="flat" cmpd="sng" algn="ctr">
                       <a:solidFill>
-                        <a:srgbClr val="D0F1DA"/>
+                        <a:srgbClr val="D4F7DE"/>
                       </a:solidFill>
                       <a:prstDash val="solid"/>
                     </a:lnL>
                     <a:lnR w="9525" cap="flat" cmpd="sng" algn="ctr">
                       <a:solidFill>
-                        <a:srgbClr val="D0F1DA"/>
+                        <a:srgbClr val="D4F7DE"/>
                       </a:solidFill>
                       <a:prstDash val="solid"/>
                     </a:lnR>
                     <a:lnT w="9525" cap="flat" cmpd="sng" algn="ctr">
                       <a:solidFill>
-                        <a:srgbClr val="D0F1DA"/>
+                        <a:srgbClr val="D4F7DE"/>
                       </a:solidFill>
                       <a:prstDash val="solid"/>
                     </a:lnT>
                     <a:lnB w="9525" cap="flat" cmpd="sng" algn="ctr">
                       <a:solidFill>
-                        <a:srgbClr val="D0F1DA"/>
+                        <a:srgbClr val="D4F7DE"/>
                       </a:solidFill>
                       <a:prstDash val="solid"/>
                     </a:lnB>
                     <a:solidFill>
-                      <a:srgbClr val="F0FAF3"/>
+                      <a:srgbClr val="F3FCF6"/>
                     </a:solidFill>
                   </a:tcPr>
                 </a:tc>
@@ -5197,30 +5197,30 @@
                   <a:tcPr anchor="ctr" marL="73152" marR="73152">
                     <a:lnL w="9525" cap="flat" cmpd="sng" algn="ctr">
                       <a:solidFill>
-                        <a:srgbClr val="D0F1DA"/>
+                        <a:srgbClr val="D4F7DE"/>
                       </a:solidFill>
                       <a:prstDash val="solid"/>
                     </a:lnL>
                     <a:lnR w="9525" cap="flat" cmpd="sng" algn="ctr">
                       <a:solidFill>
-                        <a:srgbClr val="D0F1DA"/>
+                        <a:srgbClr val="D4F7DE"/>
                       </a:solidFill>
                       <a:prstDash val="solid"/>
                     </a:lnR>
                     <a:lnT w="9525" cap="flat" cmpd="sng" algn="ctr">
                       <a:solidFill>
-                        <a:srgbClr val="D0F1DA"/>
+                        <a:srgbClr val="D4F7DE"/>
                       </a:solidFill>
                       <a:prstDash val="solid"/>
                     </a:lnT>
                     <a:lnB w="9525" cap="flat" cmpd="sng" algn="ctr">
                       <a:solidFill>
-                        <a:srgbClr val="D0F1DA"/>
+                        <a:srgbClr val="D4F7DE"/>
                       </a:solidFill>
                       <a:prstDash val="solid"/>
                     </a:lnB>
                     <a:solidFill>
-                      <a:srgbClr val="F0FAF3"/>
+                      <a:srgbClr val="F3FCF6"/>
                     </a:solidFill>
                   </a:tcPr>
                 </a:tc>
@@ -5243,30 +5243,30 @@
                   <a:tcPr anchor="ctr" marL="73152" marR="73152">
                     <a:lnL w="9525" cap="flat" cmpd="sng" algn="ctr">
                       <a:solidFill>
-                        <a:srgbClr val="D0F1DA"/>
+                        <a:srgbClr val="D4F7DE"/>
                       </a:solidFill>
                       <a:prstDash val="solid"/>
                     </a:lnL>
                     <a:lnR w="9525" cap="flat" cmpd="sng" algn="ctr">
                       <a:solidFill>
-                        <a:srgbClr val="D0F1DA"/>
+                        <a:srgbClr val="D4F7DE"/>
                       </a:solidFill>
                       <a:prstDash val="solid"/>
                     </a:lnR>
                     <a:lnT w="9525" cap="flat" cmpd="sng" algn="ctr">
                       <a:solidFill>
-                        <a:srgbClr val="D0F1DA"/>
+                        <a:srgbClr val="D4F7DE"/>
                       </a:solidFill>
                       <a:prstDash val="solid"/>
                     </a:lnT>
                     <a:lnB w="9525" cap="flat" cmpd="sng" algn="ctr">
                       <a:solidFill>
-                        <a:srgbClr val="D0F1DA"/>
+                        <a:srgbClr val="D4F7DE"/>
                       </a:solidFill>
                       <a:prstDash val="solid"/>
                     </a:lnB>
                     <a:solidFill>
-                      <a:srgbClr val="F0FAF3"/>
+                      <a:srgbClr val="F3FCF6"/>
                     </a:solidFill>
                   </a:tcPr>
                 </a:tc>
@@ -5289,30 +5289,30 @@
                   <a:tcPr anchor="ctr" marL="73152" marR="73152">
                     <a:lnL w="9525" cap="flat" cmpd="sng" algn="ctr">
                       <a:solidFill>
-                        <a:srgbClr val="D0F1DA"/>
+                        <a:srgbClr val="D4F7DE"/>
                       </a:solidFill>
                       <a:prstDash val="solid"/>
                     </a:lnL>
                     <a:lnR w="9525" cap="flat" cmpd="sng" algn="ctr">
                       <a:solidFill>
-                        <a:srgbClr val="D0F1DA"/>
+                        <a:srgbClr val="D4F7DE"/>
                       </a:solidFill>
                       <a:prstDash val="solid"/>
                     </a:lnR>
                     <a:lnT w="9525" cap="flat" cmpd="sng" algn="ctr">
                       <a:solidFill>
-                        <a:srgbClr val="D0F1DA"/>
+                        <a:srgbClr val="D4F7DE"/>
                       </a:solidFill>
                       <a:prstDash val="solid"/>
                     </a:lnT>
                     <a:lnB w="9525" cap="flat" cmpd="sng" algn="ctr">
                       <a:solidFill>
-                        <a:srgbClr val="D0F1DA"/>
+                        <a:srgbClr val="D4F7DE"/>
                       </a:solidFill>
                       <a:prstDash val="solid"/>
                     </a:lnB>
                     <a:solidFill>
-                      <a:srgbClr val="F0FAF3"/>
+                      <a:srgbClr val="F3FCF6"/>
                     </a:solidFill>
                   </a:tcPr>
                 </a:tc>
@@ -5337,25 +5337,25 @@
                   <a:tcPr anchor="ctr" marL="73152" marR="73152">
                     <a:lnL w="9525" cap="flat" cmpd="sng" algn="ctr">
                       <a:solidFill>
-                        <a:srgbClr val="D0F1DA"/>
+                        <a:srgbClr val="D4F7DE"/>
                       </a:solidFill>
                       <a:prstDash val="solid"/>
                     </a:lnL>
                     <a:lnR w="9525" cap="flat" cmpd="sng" algn="ctr">
                       <a:solidFill>
-                        <a:srgbClr val="D0F1DA"/>
+                        <a:srgbClr val="D4F7DE"/>
                       </a:solidFill>
                       <a:prstDash val="solid"/>
                     </a:lnR>
                     <a:lnT w="9525" cap="flat" cmpd="sng" algn="ctr">
                       <a:solidFill>
-                        <a:srgbClr val="D0F1DA"/>
+                        <a:srgbClr val="D4F7DE"/>
                       </a:solidFill>
                       <a:prstDash val="solid"/>
                     </a:lnT>
                     <a:lnB w="9525" cap="flat" cmpd="sng" algn="ctr">
                       <a:solidFill>
-                        <a:srgbClr val="D0F1DA"/>
+                        <a:srgbClr val="D4F7DE"/>
                       </a:solidFill>
                       <a:prstDash val="solid"/>
                     </a:lnB>
@@ -5383,25 +5383,25 @@
                   <a:tcPr anchor="ctr" marL="73152" marR="73152">
                     <a:lnL w="9525" cap="flat" cmpd="sng" algn="ctr">
                       <a:solidFill>
-                        <a:srgbClr val="D0F1DA"/>
+                        <a:srgbClr val="D4F7DE"/>
                       </a:solidFill>
                       <a:prstDash val="solid"/>
                     </a:lnL>
                     <a:lnR w="9525" cap="flat" cmpd="sng" algn="ctr">
                       <a:solidFill>
-                        <a:srgbClr val="D0F1DA"/>
+                        <a:srgbClr val="D4F7DE"/>
                       </a:solidFill>
                       <a:prstDash val="solid"/>
                     </a:lnR>
                     <a:lnT w="9525" cap="flat" cmpd="sng" algn="ctr">
                       <a:solidFill>
-                        <a:srgbClr val="D0F1DA"/>
+                        <a:srgbClr val="D4F7DE"/>
                       </a:solidFill>
                       <a:prstDash val="solid"/>
                     </a:lnT>
                     <a:lnB w="9525" cap="flat" cmpd="sng" algn="ctr">
                       <a:solidFill>
-                        <a:srgbClr val="D0F1DA"/>
+                        <a:srgbClr val="D4F7DE"/>
                       </a:solidFill>
                       <a:prstDash val="solid"/>
                     </a:lnB>
@@ -5429,25 +5429,25 @@
                   <a:tcPr anchor="ctr" marL="73152" marR="73152">
                     <a:lnL w="9525" cap="flat" cmpd="sng" algn="ctr">
                       <a:solidFill>
-                        <a:srgbClr val="D0F1DA"/>
+                        <a:srgbClr val="D4F7DE"/>
                       </a:solidFill>
                       <a:prstDash val="solid"/>
                     </a:lnL>
                     <a:lnR w="9525" cap="flat" cmpd="sng" algn="ctr">
                       <a:solidFill>
-                        <a:srgbClr val="D0F1DA"/>
+                        <a:srgbClr val="D4F7DE"/>
                       </a:solidFill>
                       <a:prstDash val="solid"/>
                     </a:lnR>
                     <a:lnT w="9525" cap="flat" cmpd="sng" algn="ctr">
                       <a:solidFill>
-                        <a:srgbClr val="D0F1DA"/>
+                        <a:srgbClr val="D4F7DE"/>
                       </a:solidFill>
                       <a:prstDash val="solid"/>
                     </a:lnT>
                     <a:lnB w="9525" cap="flat" cmpd="sng" algn="ctr">
                       <a:solidFill>
-                        <a:srgbClr val="D0F1DA"/>
+                        <a:srgbClr val="D4F7DE"/>
                       </a:solidFill>
                       <a:prstDash val="solid"/>
                     </a:lnB>
@@ -5475,25 +5475,25 @@
                   <a:tcPr anchor="ctr" marL="73152" marR="73152">
                     <a:lnL w="9525" cap="flat" cmpd="sng" algn="ctr">
                       <a:solidFill>
-                        <a:srgbClr val="D0F1DA"/>
+                        <a:srgbClr val="D4F7DE"/>
                       </a:solidFill>
                       <a:prstDash val="solid"/>
                     </a:lnL>
                     <a:lnR w="9525" cap="flat" cmpd="sng" algn="ctr">
                       <a:solidFill>
-                        <a:srgbClr val="D0F1DA"/>
+                        <a:srgbClr val="D4F7DE"/>
                       </a:solidFill>
                       <a:prstDash val="solid"/>
                     </a:lnR>
                     <a:lnT w="9525" cap="flat" cmpd="sng" algn="ctr">
                       <a:solidFill>
-                        <a:srgbClr val="D0F1DA"/>
+                        <a:srgbClr val="D4F7DE"/>
                       </a:solidFill>
                       <a:prstDash val="solid"/>
                     </a:lnT>
                     <a:lnB w="9525" cap="flat" cmpd="sng" algn="ctr">
                       <a:solidFill>
-                        <a:srgbClr val="D0F1DA"/>
+                        <a:srgbClr val="D4F7DE"/>
                       </a:solidFill>
                       <a:prstDash val="solid"/>
                     </a:lnB>
@@ -5521,25 +5521,25 @@
                   <a:tcPr anchor="ctr" marL="73152" marR="73152">
                     <a:lnL w="9525" cap="flat" cmpd="sng" algn="ctr">
                       <a:solidFill>
-                        <a:srgbClr val="D0F1DA"/>
+                        <a:srgbClr val="D4F7DE"/>
                       </a:solidFill>
                       <a:prstDash val="solid"/>
                     </a:lnL>
                     <a:lnR w="9525" cap="flat" cmpd="sng" algn="ctr">
                       <a:solidFill>
-                        <a:srgbClr val="D0F1DA"/>
+                        <a:srgbClr val="D4F7DE"/>
                       </a:solidFill>
                       <a:prstDash val="solid"/>
                     </a:lnR>
                     <a:lnT w="9525" cap="flat" cmpd="sng" algn="ctr">
                       <a:solidFill>
-                        <a:srgbClr val="D0F1DA"/>
+                        <a:srgbClr val="D4F7DE"/>
                       </a:solidFill>
                       <a:prstDash val="solid"/>
                     </a:lnT>
                     <a:lnB w="9525" cap="flat" cmpd="sng" algn="ctr">
                       <a:solidFill>
-                        <a:srgbClr val="D0F1DA"/>
+                        <a:srgbClr val="D4F7DE"/>
                       </a:solidFill>
                       <a:prstDash val="solid"/>
                     </a:lnB>
@@ -5569,30 +5569,30 @@
                   <a:tcPr anchor="ctr" marL="73152" marR="73152">
                     <a:lnL w="9525" cap="flat" cmpd="sng" algn="ctr">
                       <a:solidFill>
-                        <a:srgbClr val="D0F1DA"/>
+                        <a:srgbClr val="D4F7DE"/>
                       </a:solidFill>
                       <a:prstDash val="solid"/>
                     </a:lnL>
                     <a:lnR w="9525" cap="flat" cmpd="sng" algn="ctr">
                       <a:solidFill>
-                        <a:srgbClr val="D0F1DA"/>
+                        <a:srgbClr val="D4F7DE"/>
                       </a:solidFill>
                       <a:prstDash val="solid"/>
                     </a:lnR>
                     <a:lnT w="9525" cap="flat" cmpd="sng" algn="ctr">
                       <a:solidFill>
-                        <a:srgbClr val="D0F1DA"/>
+                        <a:srgbClr val="D4F7DE"/>
                       </a:solidFill>
                       <a:prstDash val="solid"/>
                     </a:lnT>
                     <a:lnB w="9525" cap="flat" cmpd="sng" algn="ctr">
                       <a:solidFill>
-                        <a:srgbClr val="D0F1DA"/>
+                        <a:srgbClr val="D4F7DE"/>
                       </a:solidFill>
                       <a:prstDash val="solid"/>
                     </a:lnB>
                     <a:solidFill>
-                      <a:srgbClr val="F0FAF3"/>
+                      <a:srgbClr val="F3FCF6"/>
                     </a:solidFill>
                   </a:tcPr>
                 </a:tc>
@@ -5615,30 +5615,30 @@
                   <a:tcPr anchor="ctr" marL="73152" marR="73152">
                     <a:lnL w="9525" cap="flat" cmpd="sng" algn="ctr">
                       <a:solidFill>
-                        <a:srgbClr val="D0F1DA"/>
+                        <a:srgbClr val="D4F7DE"/>
                       </a:solidFill>
                       <a:prstDash val="solid"/>
                     </a:lnL>
                     <a:lnR w="9525" cap="flat" cmpd="sng" algn="ctr">
                       <a:solidFill>
-                        <a:srgbClr val="D0F1DA"/>
+                        <a:srgbClr val="D4F7DE"/>
                       </a:solidFill>
                       <a:prstDash val="solid"/>
                     </a:lnR>
                     <a:lnT w="9525" cap="flat" cmpd="sng" algn="ctr">
                       <a:solidFill>
-                        <a:srgbClr val="D0F1DA"/>
+                        <a:srgbClr val="D4F7DE"/>
                       </a:solidFill>
                       <a:prstDash val="solid"/>
                     </a:lnT>
                     <a:lnB w="9525" cap="flat" cmpd="sng" algn="ctr">
                       <a:solidFill>
-                        <a:srgbClr val="D0F1DA"/>
+                        <a:srgbClr val="D4F7DE"/>
                       </a:solidFill>
                       <a:prstDash val="solid"/>
                     </a:lnB>
                     <a:solidFill>
-                      <a:srgbClr val="F0FAF3"/>
+                      <a:srgbClr val="F3FCF6"/>
                     </a:solidFill>
                   </a:tcPr>
                 </a:tc>
@@ -5661,30 +5661,30 @@
                   <a:tcPr anchor="ctr" marL="73152" marR="73152">
                     <a:lnL w="9525" cap="flat" cmpd="sng" algn="ctr">
                       <a:solidFill>
-                        <a:srgbClr val="D0F1DA"/>
+                        <a:srgbClr val="D4F7DE"/>
                       </a:solidFill>
                       <a:prstDash val="solid"/>
                     </a:lnL>
                     <a:lnR w="9525" cap="flat" cmpd="sng" algn="ctr">
                       <a:solidFill>
-                        <a:srgbClr val="D0F1DA"/>
+                        <a:srgbClr val="D4F7DE"/>
                       </a:solidFill>
                       <a:prstDash val="solid"/>
                     </a:lnR>
                     <a:lnT w="9525" cap="flat" cmpd="sng" algn="ctr">
                       <a:solidFill>
-                        <a:srgbClr val="D0F1DA"/>
+                        <a:srgbClr val="D4F7DE"/>
                       </a:solidFill>
                       <a:prstDash val="solid"/>
                     </a:lnT>
                     <a:lnB w="9525" cap="flat" cmpd="sng" algn="ctr">
                       <a:solidFill>
-                        <a:srgbClr val="D0F1DA"/>
+                        <a:srgbClr val="D4F7DE"/>
                       </a:solidFill>
                       <a:prstDash val="solid"/>
                     </a:lnB>
                     <a:solidFill>
-                      <a:srgbClr val="F0FAF3"/>
+                      <a:srgbClr val="F3FCF6"/>
                     </a:solidFill>
                   </a:tcPr>
                 </a:tc>
@@ -5707,30 +5707,30 @@
                   <a:tcPr anchor="ctr" marL="73152" marR="73152">
                     <a:lnL w="9525" cap="flat" cmpd="sng" algn="ctr">
                       <a:solidFill>
-                        <a:srgbClr val="D0F1DA"/>
+                        <a:srgbClr val="D4F7DE"/>
                       </a:solidFill>
                       <a:prstDash val="solid"/>
                     </a:lnL>
                     <a:lnR w="9525" cap="flat" cmpd="sng" algn="ctr">
                       <a:solidFill>
-                        <a:srgbClr val="D0F1DA"/>
+                        <a:srgbClr val="D4F7DE"/>
                       </a:solidFill>
                       <a:prstDash val="solid"/>
                     </a:lnR>
                     <a:lnT w="9525" cap="flat" cmpd="sng" algn="ctr">
                       <a:solidFill>
-                        <a:srgbClr val="D0F1DA"/>
+                        <a:srgbClr val="D4F7DE"/>
                       </a:solidFill>
                       <a:prstDash val="solid"/>
                     </a:lnT>
                     <a:lnB w="9525" cap="flat" cmpd="sng" algn="ctr">
                       <a:solidFill>
-                        <a:srgbClr val="D0F1DA"/>
+                        <a:srgbClr val="D4F7DE"/>
                       </a:solidFill>
                       <a:prstDash val="solid"/>
                     </a:lnB>
                     <a:solidFill>
-                      <a:srgbClr val="F0FAF3"/>
+                      <a:srgbClr val="F3FCF6"/>
                     </a:solidFill>
                   </a:tcPr>
                 </a:tc>
@@ -5753,30 +5753,30 @@
                   <a:tcPr anchor="ctr" marL="73152" marR="73152">
                     <a:lnL w="9525" cap="flat" cmpd="sng" algn="ctr">
                       <a:solidFill>
-                        <a:srgbClr val="D0F1DA"/>
+                        <a:srgbClr val="D4F7DE"/>
                       </a:solidFill>
                       <a:prstDash val="solid"/>
                     </a:lnL>
                     <a:lnR w="9525" cap="flat" cmpd="sng" algn="ctr">
                       <a:solidFill>
-                        <a:srgbClr val="D0F1DA"/>
+                        <a:srgbClr val="D4F7DE"/>
                       </a:solidFill>
                       <a:prstDash val="solid"/>
                     </a:lnR>
                     <a:lnT w="9525" cap="flat" cmpd="sng" algn="ctr">
                       <a:solidFill>
-                        <a:srgbClr val="D0F1DA"/>
+                        <a:srgbClr val="D4F7DE"/>
                       </a:solidFill>
                       <a:prstDash val="solid"/>
                     </a:lnT>
                     <a:lnB w="9525" cap="flat" cmpd="sng" algn="ctr">
                       <a:solidFill>
-                        <a:srgbClr val="D0F1DA"/>
+                        <a:srgbClr val="D4F7DE"/>
                       </a:solidFill>
                       <a:prstDash val="solid"/>
                     </a:lnB>
                     <a:solidFill>
-                      <a:srgbClr val="F0FAF3"/>
+                      <a:srgbClr val="F3FCF6"/>
                     </a:solidFill>
                   </a:tcPr>
                 </a:tc>
@@ -5801,25 +5801,25 @@
                   <a:tcPr anchor="ctr" marL="73152" marR="73152">
                     <a:lnL w="9525" cap="flat" cmpd="sng" algn="ctr">
                       <a:solidFill>
-                        <a:srgbClr val="D0F1DA"/>
+                        <a:srgbClr val="D4F7DE"/>
                       </a:solidFill>
                       <a:prstDash val="solid"/>
                     </a:lnL>
                     <a:lnR w="9525" cap="flat" cmpd="sng" algn="ctr">
                       <a:solidFill>
-                        <a:srgbClr val="D0F1DA"/>
+                        <a:srgbClr val="D4F7DE"/>
                       </a:solidFill>
                       <a:prstDash val="solid"/>
                     </a:lnR>
                     <a:lnT w="9525" cap="flat" cmpd="sng" algn="ctr">
                       <a:solidFill>
-                        <a:srgbClr val="D0F1DA"/>
+                        <a:srgbClr val="D4F7DE"/>
                       </a:solidFill>
                       <a:prstDash val="solid"/>
                     </a:lnT>
                     <a:lnB w="9525" cap="flat" cmpd="sng" algn="ctr">
                       <a:solidFill>
-                        <a:srgbClr val="D0F1DA"/>
+                        <a:srgbClr val="D4F7DE"/>
                       </a:solidFill>
                       <a:prstDash val="solid"/>
                     </a:lnB>
@@ -5847,25 +5847,25 @@
                   <a:tcPr anchor="ctr" marL="73152" marR="73152">
                     <a:lnL w="9525" cap="flat" cmpd="sng" algn="ctr">
                       <a:solidFill>
-                        <a:srgbClr val="D0F1DA"/>
+                        <a:srgbClr val="D4F7DE"/>
                       </a:solidFill>
                       <a:prstDash val="solid"/>
                     </a:lnL>
                     <a:lnR w="9525" cap="flat" cmpd="sng" algn="ctr">
                       <a:solidFill>
-                        <a:srgbClr val="D0F1DA"/>
+                        <a:srgbClr val="D4F7DE"/>
                       </a:solidFill>
                       <a:prstDash val="solid"/>
                     </a:lnR>
                     <a:lnT w="9525" cap="flat" cmpd="sng" algn="ctr">
                       <a:solidFill>
-                        <a:srgbClr val="D0F1DA"/>
+                        <a:srgbClr val="D4F7DE"/>
                       </a:solidFill>
                       <a:prstDash val="solid"/>
                     </a:lnT>
                     <a:lnB w="9525" cap="flat" cmpd="sng" algn="ctr">
                       <a:solidFill>
-                        <a:srgbClr val="D0F1DA"/>
+                        <a:srgbClr val="D4F7DE"/>
                       </a:solidFill>
                       <a:prstDash val="solid"/>
                     </a:lnB>
@@ -5893,25 +5893,25 @@
                   <a:tcPr anchor="ctr" marL="73152" marR="73152">
                     <a:lnL w="9525" cap="flat" cmpd="sng" algn="ctr">
                       <a:solidFill>
-                        <a:srgbClr val="D0F1DA"/>
+                        <a:srgbClr val="D4F7DE"/>
                       </a:solidFill>
                       <a:prstDash val="solid"/>
                     </a:lnL>
                     <a:lnR w="9525" cap="flat" cmpd="sng" algn="ctr">
                       <a:solidFill>
-                        <a:srgbClr val="D0F1DA"/>
+                        <a:srgbClr val="D4F7DE"/>
                       </a:solidFill>
                       <a:prstDash val="solid"/>
                     </a:lnR>
                     <a:lnT w="9525" cap="flat" cmpd="sng" algn="ctr">
                       <a:solidFill>
-                        <a:srgbClr val="D0F1DA"/>
+                        <a:srgbClr val="D4F7DE"/>
                       </a:solidFill>
                       <a:prstDash val="solid"/>
                     </a:lnT>
                     <a:lnB w="9525" cap="flat" cmpd="sng" algn="ctr">
                       <a:solidFill>
-                        <a:srgbClr val="D0F1DA"/>
+                        <a:srgbClr val="D4F7DE"/>
                       </a:solidFill>
                       <a:prstDash val="solid"/>
                     </a:lnB>
@@ -5939,25 +5939,25 @@
                   <a:tcPr anchor="ctr" marL="73152" marR="73152">
                     <a:lnL w="9525" cap="flat" cmpd="sng" algn="ctr">
                       <a:solidFill>
-                        <a:srgbClr val="D0F1DA"/>
+                        <a:srgbClr val="D4F7DE"/>
                       </a:solidFill>
                       <a:prstDash val="solid"/>
                     </a:lnL>
                     <a:lnR w="9525" cap="flat" cmpd="sng" algn="ctr">
                       <a:solidFill>
-                        <a:srgbClr val="D0F1DA"/>
+                        <a:srgbClr val="D4F7DE"/>
                       </a:solidFill>
                       <a:prstDash val="solid"/>
                     </a:lnR>
                     <a:lnT w="9525" cap="flat" cmpd="sng" algn="ctr">
                       <a:solidFill>
-                        <a:srgbClr val="D0F1DA"/>
+                        <a:srgbClr val="D4F7DE"/>
                       </a:solidFill>
                       <a:prstDash val="solid"/>
                     </a:lnT>
                     <a:lnB w="9525" cap="flat" cmpd="sng" algn="ctr">
                       <a:solidFill>
-                        <a:srgbClr val="D0F1DA"/>
+                        <a:srgbClr val="D4F7DE"/>
                       </a:solidFill>
                       <a:prstDash val="solid"/>
                     </a:lnB>
@@ -5985,25 +5985,25 @@
                   <a:tcPr anchor="ctr" marL="73152" marR="73152">
                     <a:lnL w="9525" cap="flat" cmpd="sng" algn="ctr">
                       <a:solidFill>
-                        <a:srgbClr val="D0F1DA"/>
+                        <a:srgbClr val="D4F7DE"/>
                       </a:solidFill>
                       <a:prstDash val="solid"/>
                     </a:lnL>
                     <a:lnR w="9525" cap="flat" cmpd="sng" algn="ctr">
                       <a:solidFill>
-                        <a:srgbClr val="D0F1DA"/>
+                        <a:srgbClr val="D4F7DE"/>
                       </a:solidFill>
                       <a:prstDash val="solid"/>
                     </a:lnR>
                     <a:lnT w="9525" cap="flat" cmpd="sng" algn="ctr">
                       <a:solidFill>
-                        <a:srgbClr val="D0F1DA"/>
+                        <a:srgbClr val="D4F7DE"/>
                       </a:solidFill>
                       <a:prstDash val="solid"/>
                     </a:lnT>
                     <a:lnB w="9525" cap="flat" cmpd="sng" algn="ctr">
                       <a:solidFill>
-                        <a:srgbClr val="D0F1DA"/>
+                        <a:srgbClr val="D4F7DE"/>
                       </a:solidFill>
                       <a:prstDash val="solid"/>
                     </a:lnB>
@@ -6033,30 +6033,30 @@
                   <a:tcPr anchor="ctr" marL="73152" marR="73152">
                     <a:lnL w="9525" cap="flat" cmpd="sng" algn="ctr">
                       <a:solidFill>
-                        <a:srgbClr val="D0F1DA"/>
+                        <a:srgbClr val="D4F7DE"/>
                       </a:solidFill>
                       <a:prstDash val="solid"/>
                     </a:lnL>
                     <a:lnR w="9525" cap="flat" cmpd="sng" algn="ctr">
                       <a:solidFill>
-                        <a:srgbClr val="D0F1DA"/>
+                        <a:srgbClr val="D4F7DE"/>
                       </a:solidFill>
                       <a:prstDash val="solid"/>
                     </a:lnR>
                     <a:lnT w="9525" cap="flat" cmpd="sng" algn="ctr">
                       <a:solidFill>
-                        <a:srgbClr val="D0F1DA"/>
+                        <a:srgbClr val="D4F7DE"/>
                       </a:solidFill>
                       <a:prstDash val="solid"/>
                     </a:lnT>
                     <a:lnB w="9525" cap="flat" cmpd="sng" algn="ctr">
                       <a:solidFill>
-                        <a:srgbClr val="D0F1DA"/>
+                        <a:srgbClr val="D4F7DE"/>
                       </a:solidFill>
                       <a:prstDash val="solid"/>
                     </a:lnB>
                     <a:solidFill>
-                      <a:srgbClr val="F0FAF3"/>
+                      <a:srgbClr val="F3FCF6"/>
                     </a:solidFill>
                   </a:tcPr>
                 </a:tc>
@@ -6079,30 +6079,30 @@
                   <a:tcPr anchor="ctr" marL="73152" marR="73152">
                     <a:lnL w="9525" cap="flat" cmpd="sng" algn="ctr">
                       <a:solidFill>
-                        <a:srgbClr val="D0F1DA"/>
+                        <a:srgbClr val="D4F7DE"/>
                       </a:solidFill>
                       <a:prstDash val="solid"/>
                     </a:lnL>
                     <a:lnR w="9525" cap="flat" cmpd="sng" algn="ctr">
                       <a:solidFill>
-                        <a:srgbClr val="D0F1DA"/>
+                        <a:srgbClr val="D4F7DE"/>
                       </a:solidFill>
                       <a:prstDash val="solid"/>
                     </a:lnR>
                     <a:lnT w="9525" cap="flat" cmpd="sng" algn="ctr">
                       <a:solidFill>
-                        <a:srgbClr val="D0F1DA"/>
+                        <a:srgbClr val="D4F7DE"/>
                       </a:solidFill>
                       <a:prstDash val="solid"/>
                     </a:lnT>
                     <a:lnB w="9525" cap="flat" cmpd="sng" algn="ctr">
                       <a:solidFill>
-                        <a:srgbClr val="D0F1DA"/>
+                        <a:srgbClr val="D4F7DE"/>
                       </a:solidFill>
                       <a:prstDash val="solid"/>
                     </a:lnB>
                     <a:solidFill>
-                      <a:srgbClr val="F0FAF3"/>
+                      <a:srgbClr val="F3FCF6"/>
                     </a:solidFill>
                   </a:tcPr>
                 </a:tc>
@@ -6125,30 +6125,30 @@
                   <a:tcPr anchor="ctr" marL="73152" marR="73152">
                     <a:lnL w="9525" cap="flat" cmpd="sng" algn="ctr">
                       <a:solidFill>
-                        <a:srgbClr val="D0F1DA"/>
+                        <a:srgbClr val="D4F7DE"/>
                       </a:solidFill>
                       <a:prstDash val="solid"/>
                     </a:lnL>
                     <a:lnR w="9525" cap="flat" cmpd="sng" algn="ctr">
                       <a:solidFill>
-                        <a:srgbClr val="D0F1DA"/>
+                        <a:srgbClr val="D4F7DE"/>
                       </a:solidFill>
                       <a:prstDash val="solid"/>
                     </a:lnR>
                     <a:lnT w="9525" cap="flat" cmpd="sng" algn="ctr">
                       <a:solidFill>
-                        <a:srgbClr val="D0F1DA"/>
+                        <a:srgbClr val="D4F7DE"/>
                       </a:solidFill>
                       <a:prstDash val="solid"/>
                     </a:lnT>
                     <a:lnB w="9525" cap="flat" cmpd="sng" algn="ctr">
                       <a:solidFill>
-                        <a:srgbClr val="D0F1DA"/>
+                        <a:srgbClr val="D4F7DE"/>
                       </a:solidFill>
                       <a:prstDash val="solid"/>
                     </a:lnB>
                     <a:solidFill>
-                      <a:srgbClr val="F0FAF3"/>
+                      <a:srgbClr val="F3FCF6"/>
                     </a:solidFill>
                   </a:tcPr>
                 </a:tc>
@@ -6171,30 +6171,30 @@
                   <a:tcPr anchor="ctr" marL="73152" marR="73152">
                     <a:lnL w="9525" cap="flat" cmpd="sng" algn="ctr">
                       <a:solidFill>
-                        <a:srgbClr val="D0F1DA"/>
+                        <a:srgbClr val="D4F7DE"/>
                       </a:solidFill>
                       <a:prstDash val="solid"/>
                     </a:lnL>
                     <a:lnR w="9525" cap="flat" cmpd="sng" algn="ctr">
                       <a:solidFill>
-                        <a:srgbClr val="D0F1DA"/>
+                        <a:srgbClr val="D4F7DE"/>
                       </a:solidFill>
                       <a:prstDash val="solid"/>
                     </a:lnR>
                     <a:lnT w="9525" cap="flat" cmpd="sng" algn="ctr">
                       <a:solidFill>
-                        <a:srgbClr val="D0F1DA"/>
+                        <a:srgbClr val="D4F7DE"/>
                       </a:solidFill>
                       <a:prstDash val="solid"/>
                     </a:lnT>
                     <a:lnB w="9525" cap="flat" cmpd="sng" algn="ctr">
                       <a:solidFill>
-                        <a:srgbClr val="D0F1DA"/>
+                        <a:srgbClr val="D4F7DE"/>
                       </a:solidFill>
                       <a:prstDash val="solid"/>
                     </a:lnB>
                     <a:solidFill>
-                      <a:srgbClr val="F0FAF3"/>
+                      <a:srgbClr val="F3FCF6"/>
                     </a:solidFill>
                   </a:tcPr>
                 </a:tc>
@@ -6217,30 +6217,30 @@
                   <a:tcPr anchor="ctr" marL="73152" marR="73152">
                     <a:lnL w="9525" cap="flat" cmpd="sng" algn="ctr">
                       <a:solidFill>
-                        <a:srgbClr val="D0F1DA"/>
+                        <a:srgbClr val="D4F7DE"/>
                       </a:solidFill>
                       <a:prstDash val="solid"/>
                     </a:lnL>
                     <a:lnR w="9525" cap="flat" cmpd="sng" algn="ctr">
                       <a:solidFill>
-                        <a:srgbClr val="D0F1DA"/>
+                        <a:srgbClr val="D4F7DE"/>
                       </a:solidFill>
                       <a:prstDash val="solid"/>
                     </a:lnR>
                     <a:lnT w="9525" cap="flat" cmpd="sng" algn="ctr">
                       <a:solidFill>
-                        <a:srgbClr val="D0F1DA"/>
+                        <a:srgbClr val="D4F7DE"/>
                       </a:solidFill>
                       <a:prstDash val="solid"/>
                     </a:lnT>
                     <a:lnB w="9525" cap="flat" cmpd="sng" algn="ctr">
                       <a:solidFill>
-                        <a:srgbClr val="D0F1DA"/>
+                        <a:srgbClr val="D4F7DE"/>
                       </a:solidFill>
                       <a:prstDash val="solid"/>
                     </a:lnB>
                     <a:solidFill>
-                      <a:srgbClr val="F0FAF3"/>
+                      <a:srgbClr val="F3FCF6"/>
                     </a:solidFill>
                   </a:tcPr>
                 </a:tc>
@@ -6263,7 +6263,7 @@
     <p:bg>
       <p:bgPr>
         <a:solidFill>
-          <a:srgbClr val="D0F1DA"/>
+          <a:srgbClr val="D4F7DE"/>
         </a:solidFill>
         <a:effectLst/>
       </p:bgPr>
@@ -6294,7 +6294,7 @@
           </a:solidFill>
           <a:ln w="25400">
             <a:solidFill>
-              <a:srgbClr val="2B8245"/>
+              <a:srgbClr val="43D66F"/>
             </a:solidFill>
             <a:prstDash val="dash"/>
           </a:ln>
@@ -6337,7 +6337,7 @@
             <a:r>
               <a:rPr sz="3000" b="1" i="0">
                 <a:solidFill>
-                  <a:srgbClr val="143D21"/>
+                  <a:srgbClr val="1D7236"/>
                 </a:solidFill>
               </a:rPr>
               <a:t>보장 항목 체크</a:t>
@@ -6389,30 +6389,30 @@
                   <a:tcPr anchor="ctr" marL="73152" marR="73152">
                     <a:lnL w="9525" cap="flat" cmpd="sng" algn="ctr">
                       <a:solidFill>
-                        <a:srgbClr val="2B8245"/>
+                        <a:srgbClr val="43D66F"/>
                       </a:solidFill>
                       <a:prstDash val="solid"/>
                     </a:lnL>
                     <a:lnR w="9525" cap="flat" cmpd="sng" algn="ctr">
                       <a:solidFill>
-                        <a:srgbClr val="2B8245"/>
+                        <a:srgbClr val="43D66F"/>
                       </a:solidFill>
                       <a:prstDash val="solid"/>
                     </a:lnR>
                     <a:lnT w="9525" cap="flat" cmpd="sng" algn="ctr">
                       <a:solidFill>
-                        <a:srgbClr val="2B8245"/>
+                        <a:srgbClr val="43D66F"/>
                       </a:solidFill>
                       <a:prstDash val="solid"/>
                     </a:lnT>
                     <a:lnB w="9525" cap="flat" cmpd="sng" algn="ctr">
                       <a:solidFill>
-                        <a:srgbClr val="2B8245"/>
+                        <a:srgbClr val="43D66F"/>
                       </a:solidFill>
                       <a:prstDash val="solid"/>
                     </a:lnB>
                     <a:solidFill>
-                      <a:srgbClr val="2B8245"/>
+                      <a:srgbClr val="43D66F"/>
                     </a:solidFill>
                   </a:tcPr>
                 </a:tc>
@@ -6435,30 +6435,30 @@
                   <a:tcPr anchor="ctr" marL="73152" marR="73152">
                     <a:lnL w="9525" cap="flat" cmpd="sng" algn="ctr">
                       <a:solidFill>
-                        <a:srgbClr val="2B8245"/>
+                        <a:srgbClr val="43D66F"/>
                       </a:solidFill>
                       <a:prstDash val="solid"/>
                     </a:lnL>
                     <a:lnR w="9525" cap="flat" cmpd="sng" algn="ctr">
                       <a:solidFill>
-                        <a:srgbClr val="2B8245"/>
+                        <a:srgbClr val="43D66F"/>
                       </a:solidFill>
                       <a:prstDash val="solid"/>
                     </a:lnR>
                     <a:lnT w="9525" cap="flat" cmpd="sng" algn="ctr">
                       <a:solidFill>
-                        <a:srgbClr val="2B8245"/>
+                        <a:srgbClr val="43D66F"/>
                       </a:solidFill>
                       <a:prstDash val="solid"/>
                     </a:lnT>
                     <a:lnB w="9525" cap="flat" cmpd="sng" algn="ctr">
                       <a:solidFill>
-                        <a:srgbClr val="2B8245"/>
+                        <a:srgbClr val="43D66F"/>
                       </a:solidFill>
                       <a:prstDash val="solid"/>
                     </a:lnB>
                     <a:solidFill>
-                      <a:srgbClr val="2B8245"/>
+                      <a:srgbClr val="43D66F"/>
                     </a:solidFill>
                   </a:tcPr>
                 </a:tc>
@@ -6481,30 +6481,30 @@
                   <a:tcPr anchor="ctr" marL="73152" marR="73152">
                     <a:lnL w="9525" cap="flat" cmpd="sng" algn="ctr">
                       <a:solidFill>
-                        <a:srgbClr val="2B8245"/>
+                        <a:srgbClr val="43D66F"/>
                       </a:solidFill>
                       <a:prstDash val="solid"/>
                     </a:lnL>
                     <a:lnR w="9525" cap="flat" cmpd="sng" algn="ctr">
                       <a:solidFill>
-                        <a:srgbClr val="2B8245"/>
+                        <a:srgbClr val="43D66F"/>
                       </a:solidFill>
                       <a:prstDash val="solid"/>
                     </a:lnR>
                     <a:lnT w="9525" cap="flat" cmpd="sng" algn="ctr">
                       <a:solidFill>
-                        <a:srgbClr val="2B8245"/>
+                        <a:srgbClr val="43D66F"/>
                       </a:solidFill>
                       <a:prstDash val="solid"/>
                     </a:lnT>
                     <a:lnB w="9525" cap="flat" cmpd="sng" algn="ctr">
                       <a:solidFill>
-                        <a:srgbClr val="2B8245"/>
+                        <a:srgbClr val="43D66F"/>
                       </a:solidFill>
                       <a:prstDash val="solid"/>
                     </a:lnB>
                     <a:solidFill>
-                      <a:srgbClr val="2B8245"/>
+                      <a:srgbClr val="43D66F"/>
                     </a:solidFill>
                   </a:tcPr>
                 </a:tc>
@@ -6527,30 +6527,30 @@
                   <a:tcPr anchor="ctr" marL="73152" marR="73152">
                     <a:lnL w="9525" cap="flat" cmpd="sng" algn="ctr">
                       <a:solidFill>
-                        <a:srgbClr val="2B8245"/>
+                        <a:srgbClr val="43D66F"/>
                       </a:solidFill>
                       <a:prstDash val="solid"/>
                     </a:lnL>
                     <a:lnR w="9525" cap="flat" cmpd="sng" algn="ctr">
                       <a:solidFill>
-                        <a:srgbClr val="2B8245"/>
+                        <a:srgbClr val="43D66F"/>
                       </a:solidFill>
                       <a:prstDash val="solid"/>
                     </a:lnR>
                     <a:lnT w="9525" cap="flat" cmpd="sng" algn="ctr">
                       <a:solidFill>
-                        <a:srgbClr val="2B8245"/>
+                        <a:srgbClr val="43D66F"/>
                       </a:solidFill>
                       <a:prstDash val="solid"/>
                     </a:lnT>
                     <a:lnB w="9525" cap="flat" cmpd="sng" algn="ctr">
                       <a:solidFill>
-                        <a:srgbClr val="2B8245"/>
+                        <a:srgbClr val="43D66F"/>
                       </a:solidFill>
                       <a:prstDash val="solid"/>
                     </a:lnB>
                     <a:solidFill>
-                      <a:srgbClr val="2B8245"/>
+                      <a:srgbClr val="43D66F"/>
                     </a:solidFill>
                   </a:tcPr>
                 </a:tc>
@@ -6565,7 +6565,7 @@
                       <a:r>
                         <a:rPr sz="1400" b="1">
                           <a:solidFill>
-                            <a:srgbClr val="143D21"/>
+                            <a:srgbClr val="1D7236"/>
                           </a:solidFill>
                         </a:rPr>
                         <a:t>사망·재해</a:t>
@@ -6575,30 +6575,30 @@
                   <a:tcPr anchor="ctr" marL="73152" marR="73152">
                     <a:lnL w="9525" cap="flat" cmpd="sng" algn="ctr">
                       <a:solidFill>
-                        <a:srgbClr val="D0F1DA"/>
+                        <a:srgbClr val="D4F7DE"/>
                       </a:solidFill>
                       <a:prstDash val="solid"/>
                     </a:lnL>
                     <a:lnR w="9525" cap="flat" cmpd="sng" algn="ctr">
                       <a:solidFill>
-                        <a:srgbClr val="D0F1DA"/>
+                        <a:srgbClr val="D4F7DE"/>
                       </a:solidFill>
                       <a:prstDash val="solid"/>
                     </a:lnR>
                     <a:lnT w="9525" cap="flat" cmpd="sng" algn="ctr">
                       <a:solidFill>
-                        <a:srgbClr val="D0F1DA"/>
+                        <a:srgbClr val="D4F7DE"/>
                       </a:solidFill>
                       <a:prstDash val="solid"/>
                     </a:lnT>
                     <a:lnB w="9525" cap="flat" cmpd="sng" algn="ctr">
                       <a:solidFill>
-                        <a:srgbClr val="D0F1DA"/>
+                        <a:srgbClr val="D4F7DE"/>
                       </a:solidFill>
                       <a:prstDash val="solid"/>
                     </a:lnB>
                     <a:solidFill>
-                      <a:srgbClr val="D0F1DA"/>
+                      <a:srgbClr val="D4F7DE"/>
                     </a:solidFill>
                   </a:tcPr>
                 </a:tc>
@@ -6621,25 +6621,25 @@
                   <a:tcPr anchor="ctr" marL="73152" marR="73152">
                     <a:lnL w="9525" cap="flat" cmpd="sng" algn="ctr">
                       <a:solidFill>
-                        <a:srgbClr val="D0F1DA"/>
+                        <a:srgbClr val="D4F7DE"/>
                       </a:solidFill>
                       <a:prstDash val="solid"/>
                     </a:lnL>
                     <a:lnR w="9525" cap="flat" cmpd="sng" algn="ctr">
                       <a:solidFill>
-                        <a:srgbClr val="D0F1DA"/>
+                        <a:srgbClr val="D4F7DE"/>
                       </a:solidFill>
                       <a:prstDash val="solid"/>
                     </a:lnR>
                     <a:lnT w="9525" cap="flat" cmpd="sng" algn="ctr">
                       <a:solidFill>
-                        <a:srgbClr val="D0F1DA"/>
+                        <a:srgbClr val="D4F7DE"/>
                       </a:solidFill>
                       <a:prstDash val="solid"/>
                     </a:lnT>
                     <a:lnB w="9525" cap="flat" cmpd="sng" algn="ctr">
                       <a:solidFill>
-                        <a:srgbClr val="D0F1DA"/>
+                        <a:srgbClr val="D4F7DE"/>
                       </a:solidFill>
                       <a:prstDash val="solid"/>
                     </a:lnB>
@@ -6667,25 +6667,25 @@
                   <a:tcPr anchor="ctr" marL="73152" marR="73152">
                     <a:lnL w="9525" cap="flat" cmpd="sng" algn="ctr">
                       <a:solidFill>
-                        <a:srgbClr val="D0F1DA"/>
+                        <a:srgbClr val="D4F7DE"/>
                       </a:solidFill>
                       <a:prstDash val="solid"/>
                     </a:lnL>
                     <a:lnR w="9525" cap="flat" cmpd="sng" algn="ctr">
                       <a:solidFill>
-                        <a:srgbClr val="D0F1DA"/>
+                        <a:srgbClr val="D4F7DE"/>
                       </a:solidFill>
                       <a:prstDash val="solid"/>
                     </a:lnR>
                     <a:lnT w="9525" cap="flat" cmpd="sng" algn="ctr">
                       <a:solidFill>
-                        <a:srgbClr val="D0F1DA"/>
+                        <a:srgbClr val="D4F7DE"/>
                       </a:solidFill>
                       <a:prstDash val="solid"/>
                     </a:lnT>
                     <a:lnB w="9525" cap="flat" cmpd="sng" algn="ctr">
                       <a:solidFill>
-                        <a:srgbClr val="D0F1DA"/>
+                        <a:srgbClr val="D4F7DE"/>
                       </a:solidFill>
                       <a:prstDash val="solid"/>
                     </a:lnB>
@@ -6713,25 +6713,25 @@
                   <a:tcPr anchor="ctr" marL="73152" marR="73152">
                     <a:lnL w="9525" cap="flat" cmpd="sng" algn="ctr">
                       <a:solidFill>
-                        <a:srgbClr val="D0F1DA"/>
+                        <a:srgbClr val="D4F7DE"/>
                       </a:solidFill>
                       <a:prstDash val="solid"/>
                     </a:lnL>
                     <a:lnR w="9525" cap="flat" cmpd="sng" algn="ctr">
                       <a:solidFill>
-                        <a:srgbClr val="D0F1DA"/>
+                        <a:srgbClr val="D4F7DE"/>
                       </a:solidFill>
                       <a:prstDash val="solid"/>
                     </a:lnR>
                     <a:lnT w="9525" cap="flat" cmpd="sng" algn="ctr">
                       <a:solidFill>
-                        <a:srgbClr val="D0F1DA"/>
+                        <a:srgbClr val="D4F7DE"/>
                       </a:solidFill>
                       <a:prstDash val="solid"/>
                     </a:lnT>
                     <a:lnB w="9525" cap="flat" cmpd="sng" algn="ctr">
                       <a:solidFill>
-                        <a:srgbClr val="D0F1DA"/>
+                        <a:srgbClr val="D4F7DE"/>
                       </a:solidFill>
                       <a:prstDash val="solid"/>
                     </a:lnB>
@@ -6751,7 +6751,7 @@
                       <a:r>
                         <a:rPr sz="1400" b="1">
                           <a:solidFill>
-                            <a:srgbClr val="143D21"/>
+                            <a:srgbClr val="1D7236"/>
                           </a:solidFill>
                         </a:rPr>
                         <a:t>질병 진단</a:t>
@@ -6761,30 +6761,30 @@
                   <a:tcPr anchor="ctr" marL="73152" marR="73152">
                     <a:lnL w="9525" cap="flat" cmpd="sng" algn="ctr">
                       <a:solidFill>
-                        <a:srgbClr val="D0F1DA"/>
+                        <a:srgbClr val="D4F7DE"/>
                       </a:solidFill>
                       <a:prstDash val="solid"/>
                     </a:lnL>
                     <a:lnR w="9525" cap="flat" cmpd="sng" algn="ctr">
                       <a:solidFill>
-                        <a:srgbClr val="D0F1DA"/>
+                        <a:srgbClr val="D4F7DE"/>
                       </a:solidFill>
                       <a:prstDash val="solid"/>
                     </a:lnR>
                     <a:lnT w="9525" cap="flat" cmpd="sng" algn="ctr">
                       <a:solidFill>
-                        <a:srgbClr val="D0F1DA"/>
+                        <a:srgbClr val="D4F7DE"/>
                       </a:solidFill>
                       <a:prstDash val="solid"/>
                     </a:lnT>
                     <a:lnB w="9525" cap="flat" cmpd="sng" algn="ctr">
                       <a:solidFill>
-                        <a:srgbClr val="D0F1DA"/>
+                        <a:srgbClr val="D4F7DE"/>
                       </a:solidFill>
                       <a:prstDash val="solid"/>
                     </a:lnB>
                     <a:solidFill>
-                      <a:srgbClr val="D0F1DA"/>
+                      <a:srgbClr val="D4F7DE"/>
                     </a:solidFill>
                   </a:tcPr>
                 </a:tc>
@@ -6807,30 +6807,30 @@
                   <a:tcPr anchor="ctr" marL="73152" marR="73152">
                     <a:lnL w="9525" cap="flat" cmpd="sng" algn="ctr">
                       <a:solidFill>
-                        <a:srgbClr val="D0F1DA"/>
+                        <a:srgbClr val="D4F7DE"/>
                       </a:solidFill>
                       <a:prstDash val="solid"/>
                     </a:lnL>
                     <a:lnR w="9525" cap="flat" cmpd="sng" algn="ctr">
                       <a:solidFill>
-                        <a:srgbClr val="D0F1DA"/>
+                        <a:srgbClr val="D4F7DE"/>
                       </a:solidFill>
                       <a:prstDash val="solid"/>
                     </a:lnR>
                     <a:lnT w="9525" cap="flat" cmpd="sng" algn="ctr">
                       <a:solidFill>
-                        <a:srgbClr val="D0F1DA"/>
+                        <a:srgbClr val="D4F7DE"/>
                       </a:solidFill>
                       <a:prstDash val="solid"/>
                     </a:lnT>
                     <a:lnB w="9525" cap="flat" cmpd="sng" algn="ctr">
                       <a:solidFill>
-                        <a:srgbClr val="D0F1DA"/>
+                        <a:srgbClr val="D4F7DE"/>
                       </a:solidFill>
                       <a:prstDash val="solid"/>
                     </a:lnB>
                     <a:solidFill>
-                      <a:srgbClr val="F0FAF3"/>
+                      <a:srgbClr val="F3FCF6"/>
                     </a:solidFill>
                   </a:tcPr>
                 </a:tc>
@@ -6853,30 +6853,30 @@
                   <a:tcPr anchor="ctr" marL="73152" marR="73152">
                     <a:lnL w="9525" cap="flat" cmpd="sng" algn="ctr">
                       <a:solidFill>
-                        <a:srgbClr val="D0F1DA"/>
+                        <a:srgbClr val="D4F7DE"/>
                       </a:solidFill>
                       <a:prstDash val="solid"/>
                     </a:lnL>
                     <a:lnR w="9525" cap="flat" cmpd="sng" algn="ctr">
                       <a:solidFill>
-                        <a:srgbClr val="D0F1DA"/>
+                        <a:srgbClr val="D4F7DE"/>
                       </a:solidFill>
                       <a:prstDash val="solid"/>
                     </a:lnR>
                     <a:lnT w="9525" cap="flat" cmpd="sng" algn="ctr">
                       <a:solidFill>
-                        <a:srgbClr val="D0F1DA"/>
+                        <a:srgbClr val="D4F7DE"/>
                       </a:solidFill>
                       <a:prstDash val="solid"/>
                     </a:lnT>
                     <a:lnB w="9525" cap="flat" cmpd="sng" algn="ctr">
                       <a:solidFill>
-                        <a:srgbClr val="D0F1DA"/>
+                        <a:srgbClr val="D4F7DE"/>
                       </a:solidFill>
                       <a:prstDash val="solid"/>
                     </a:lnB>
                     <a:solidFill>
-                      <a:srgbClr val="F0FAF3"/>
+                      <a:srgbClr val="F3FCF6"/>
                     </a:solidFill>
                   </a:tcPr>
                 </a:tc>
@@ -6899,30 +6899,30 @@
                   <a:tcPr anchor="ctr" marL="73152" marR="73152">
                     <a:lnL w="9525" cap="flat" cmpd="sng" algn="ctr">
                       <a:solidFill>
-                        <a:srgbClr val="D0F1DA"/>
+                        <a:srgbClr val="D4F7DE"/>
                       </a:solidFill>
                       <a:prstDash val="solid"/>
                     </a:lnL>
                     <a:lnR w="9525" cap="flat" cmpd="sng" algn="ctr">
                       <a:solidFill>
-                        <a:srgbClr val="D0F1DA"/>
+                        <a:srgbClr val="D4F7DE"/>
                       </a:solidFill>
                       <a:prstDash val="solid"/>
                     </a:lnR>
                     <a:lnT w="9525" cap="flat" cmpd="sng" algn="ctr">
                       <a:solidFill>
-                        <a:srgbClr val="D0F1DA"/>
+                        <a:srgbClr val="D4F7DE"/>
                       </a:solidFill>
                       <a:prstDash val="solid"/>
                     </a:lnT>
                     <a:lnB w="9525" cap="flat" cmpd="sng" algn="ctr">
                       <a:solidFill>
-                        <a:srgbClr val="D0F1DA"/>
+                        <a:srgbClr val="D4F7DE"/>
                       </a:solidFill>
                       <a:prstDash val="solid"/>
                     </a:lnB>
                     <a:solidFill>
-                      <a:srgbClr val="F0FAF3"/>
+                      <a:srgbClr val="F3FCF6"/>
                     </a:solidFill>
                   </a:tcPr>
                 </a:tc>
@@ -6937,7 +6937,7 @@
                       <a:r>
                         <a:rPr sz="1400" b="1">
                           <a:solidFill>
-                            <a:srgbClr val="143D21"/>
+                            <a:srgbClr val="1D7236"/>
                           </a:solidFill>
                         </a:rPr>
                         <a:t>암</a:t>
@@ -6947,30 +6947,30 @@
                   <a:tcPr anchor="ctr" marL="73152" marR="73152">
                     <a:lnL w="9525" cap="flat" cmpd="sng" algn="ctr">
                       <a:solidFill>
-                        <a:srgbClr val="D0F1DA"/>
+                        <a:srgbClr val="D4F7DE"/>
                       </a:solidFill>
                       <a:prstDash val="solid"/>
                     </a:lnL>
                     <a:lnR w="9525" cap="flat" cmpd="sng" algn="ctr">
                       <a:solidFill>
-                        <a:srgbClr val="D0F1DA"/>
+                        <a:srgbClr val="D4F7DE"/>
                       </a:solidFill>
                       <a:prstDash val="solid"/>
                     </a:lnR>
                     <a:lnT w="9525" cap="flat" cmpd="sng" algn="ctr">
                       <a:solidFill>
-                        <a:srgbClr val="D0F1DA"/>
+                        <a:srgbClr val="D4F7DE"/>
                       </a:solidFill>
                       <a:prstDash val="solid"/>
                     </a:lnT>
                     <a:lnB w="9525" cap="flat" cmpd="sng" algn="ctr">
                       <a:solidFill>
-                        <a:srgbClr val="D0F1DA"/>
+                        <a:srgbClr val="D4F7DE"/>
                       </a:solidFill>
                       <a:prstDash val="solid"/>
                     </a:lnB>
                     <a:solidFill>
-                      <a:srgbClr val="D0F1DA"/>
+                      <a:srgbClr val="D4F7DE"/>
                     </a:solidFill>
                   </a:tcPr>
                 </a:tc>
@@ -6993,25 +6993,25 @@
                   <a:tcPr anchor="ctr" marL="73152" marR="73152">
                     <a:lnL w="9525" cap="flat" cmpd="sng" algn="ctr">
                       <a:solidFill>
-                        <a:srgbClr val="D0F1DA"/>
+                        <a:srgbClr val="D4F7DE"/>
                       </a:solidFill>
                       <a:prstDash val="solid"/>
                     </a:lnL>
                     <a:lnR w="9525" cap="flat" cmpd="sng" algn="ctr">
                       <a:solidFill>
-                        <a:srgbClr val="D0F1DA"/>
+                        <a:srgbClr val="D4F7DE"/>
                       </a:solidFill>
                       <a:prstDash val="solid"/>
                     </a:lnR>
                     <a:lnT w="9525" cap="flat" cmpd="sng" algn="ctr">
                       <a:solidFill>
-                        <a:srgbClr val="D0F1DA"/>
+                        <a:srgbClr val="D4F7DE"/>
                       </a:solidFill>
                       <a:prstDash val="solid"/>
                     </a:lnT>
                     <a:lnB w="9525" cap="flat" cmpd="sng" algn="ctr">
                       <a:solidFill>
-                        <a:srgbClr val="D0F1DA"/>
+                        <a:srgbClr val="D4F7DE"/>
                       </a:solidFill>
                       <a:prstDash val="solid"/>
                     </a:lnB>
@@ -7039,25 +7039,25 @@
                   <a:tcPr anchor="ctr" marL="73152" marR="73152">
                     <a:lnL w="9525" cap="flat" cmpd="sng" algn="ctr">
                       <a:solidFill>
-                        <a:srgbClr val="D0F1DA"/>
+                        <a:srgbClr val="D4F7DE"/>
                       </a:solidFill>
                       <a:prstDash val="solid"/>
                     </a:lnL>
                     <a:lnR w="9525" cap="flat" cmpd="sng" algn="ctr">
                       <a:solidFill>
-                        <a:srgbClr val="D0F1DA"/>
+                        <a:srgbClr val="D4F7DE"/>
                       </a:solidFill>
                       <a:prstDash val="solid"/>
                     </a:lnR>
                     <a:lnT w="9525" cap="flat" cmpd="sng" algn="ctr">
                       <a:solidFill>
-                        <a:srgbClr val="D0F1DA"/>
+                        <a:srgbClr val="D4F7DE"/>
                       </a:solidFill>
                       <a:prstDash val="solid"/>
                     </a:lnT>
                     <a:lnB w="9525" cap="flat" cmpd="sng" algn="ctr">
                       <a:solidFill>
-                        <a:srgbClr val="D0F1DA"/>
+                        <a:srgbClr val="D4F7DE"/>
                       </a:solidFill>
                       <a:prstDash val="solid"/>
                     </a:lnB>
@@ -7085,25 +7085,25 @@
                   <a:tcPr anchor="ctr" marL="73152" marR="73152">
                     <a:lnL w="9525" cap="flat" cmpd="sng" algn="ctr">
                       <a:solidFill>
-                        <a:srgbClr val="D0F1DA"/>
+                        <a:srgbClr val="D4F7DE"/>
                       </a:solidFill>
                       <a:prstDash val="solid"/>
                     </a:lnL>
                     <a:lnR w="9525" cap="flat" cmpd="sng" algn="ctr">
                       <a:solidFill>
-                        <a:srgbClr val="D0F1DA"/>
+                        <a:srgbClr val="D4F7DE"/>
                       </a:solidFill>
                       <a:prstDash val="solid"/>
                     </a:lnR>
                     <a:lnT w="9525" cap="flat" cmpd="sng" algn="ctr">
                       <a:solidFill>
-                        <a:srgbClr val="D0F1DA"/>
+                        <a:srgbClr val="D4F7DE"/>
                       </a:solidFill>
                       <a:prstDash val="solid"/>
                     </a:lnT>
                     <a:lnB w="9525" cap="flat" cmpd="sng" algn="ctr">
                       <a:solidFill>
-                        <a:srgbClr val="D0F1DA"/>
+                        <a:srgbClr val="D4F7DE"/>
                       </a:solidFill>
                       <a:prstDash val="solid"/>
                     </a:lnB>
@@ -7123,7 +7123,7 @@
                       <a:r>
                         <a:rPr sz="1400" b="1">
                           <a:solidFill>
-                            <a:srgbClr val="143D21"/>
+                            <a:srgbClr val="1D7236"/>
                           </a:solidFill>
                         </a:rPr>
                         <a:t>뇌·심장</a:t>
@@ -7133,30 +7133,30 @@
                   <a:tcPr anchor="ctr" marL="73152" marR="73152">
                     <a:lnL w="9525" cap="flat" cmpd="sng" algn="ctr">
                       <a:solidFill>
-                        <a:srgbClr val="D0F1DA"/>
+                        <a:srgbClr val="D4F7DE"/>
                       </a:solidFill>
                       <a:prstDash val="solid"/>
                     </a:lnL>
                     <a:lnR w="9525" cap="flat" cmpd="sng" algn="ctr">
                       <a:solidFill>
-                        <a:srgbClr val="D0F1DA"/>
+                        <a:srgbClr val="D4F7DE"/>
                       </a:solidFill>
                       <a:prstDash val="solid"/>
                     </a:lnR>
                     <a:lnT w="9525" cap="flat" cmpd="sng" algn="ctr">
                       <a:solidFill>
-                        <a:srgbClr val="D0F1DA"/>
+                        <a:srgbClr val="D4F7DE"/>
                       </a:solidFill>
                       <a:prstDash val="solid"/>
                     </a:lnT>
                     <a:lnB w="9525" cap="flat" cmpd="sng" algn="ctr">
                       <a:solidFill>
-                        <a:srgbClr val="D0F1DA"/>
+                        <a:srgbClr val="D4F7DE"/>
                       </a:solidFill>
                       <a:prstDash val="solid"/>
                     </a:lnB>
                     <a:solidFill>
-                      <a:srgbClr val="D0F1DA"/>
+                      <a:srgbClr val="D4F7DE"/>
                     </a:solidFill>
                   </a:tcPr>
                 </a:tc>
@@ -7179,30 +7179,30 @@
                   <a:tcPr anchor="ctr" marL="73152" marR="73152">
                     <a:lnL w="9525" cap="flat" cmpd="sng" algn="ctr">
                       <a:solidFill>
-                        <a:srgbClr val="D0F1DA"/>
+                        <a:srgbClr val="D4F7DE"/>
                       </a:solidFill>
                       <a:prstDash val="solid"/>
                     </a:lnL>
                     <a:lnR w="9525" cap="flat" cmpd="sng" algn="ctr">
                       <a:solidFill>
-                        <a:srgbClr val="D0F1DA"/>
+                        <a:srgbClr val="D4F7DE"/>
                       </a:solidFill>
                       <a:prstDash val="solid"/>
                     </a:lnR>
                     <a:lnT w="9525" cap="flat" cmpd="sng" algn="ctr">
                       <a:solidFill>
-                        <a:srgbClr val="D0F1DA"/>
+                        <a:srgbClr val="D4F7DE"/>
                       </a:solidFill>
                       <a:prstDash val="solid"/>
                     </a:lnT>
                     <a:lnB w="9525" cap="flat" cmpd="sng" algn="ctr">
                       <a:solidFill>
-                        <a:srgbClr val="D0F1DA"/>
+                        <a:srgbClr val="D4F7DE"/>
                       </a:solidFill>
                       <a:prstDash val="solid"/>
                     </a:lnB>
                     <a:solidFill>
-                      <a:srgbClr val="F0FAF3"/>
+                      <a:srgbClr val="F3FCF6"/>
                     </a:solidFill>
                   </a:tcPr>
                 </a:tc>
@@ -7225,30 +7225,30 @@
                   <a:tcPr anchor="ctr" marL="73152" marR="73152">
                     <a:lnL w="9525" cap="flat" cmpd="sng" algn="ctr">
                       <a:solidFill>
-                        <a:srgbClr val="D0F1DA"/>
+                        <a:srgbClr val="D4F7DE"/>
                       </a:solidFill>
                       <a:prstDash val="solid"/>
                     </a:lnL>
                     <a:lnR w="9525" cap="flat" cmpd="sng" algn="ctr">
                       <a:solidFill>
-                        <a:srgbClr val="D0F1DA"/>
+                        <a:srgbClr val="D4F7DE"/>
                       </a:solidFill>
                       <a:prstDash val="solid"/>
                     </a:lnR>
                     <a:lnT w="9525" cap="flat" cmpd="sng" algn="ctr">
                       <a:solidFill>
-                        <a:srgbClr val="D0F1DA"/>
+                        <a:srgbClr val="D4F7DE"/>
                       </a:solidFill>
                       <a:prstDash val="solid"/>
                     </a:lnT>
                     <a:lnB w="9525" cap="flat" cmpd="sng" algn="ctr">
                       <a:solidFill>
-                        <a:srgbClr val="D0F1DA"/>
+                        <a:srgbClr val="D4F7DE"/>
                       </a:solidFill>
                       <a:prstDash val="solid"/>
                     </a:lnB>
                     <a:solidFill>
-                      <a:srgbClr val="F0FAF3"/>
+                      <a:srgbClr val="F3FCF6"/>
                     </a:solidFill>
                   </a:tcPr>
                 </a:tc>
@@ -7271,30 +7271,30 @@
                   <a:tcPr anchor="ctr" marL="73152" marR="73152">
                     <a:lnL w="9525" cap="flat" cmpd="sng" algn="ctr">
                       <a:solidFill>
-                        <a:srgbClr val="D0F1DA"/>
+                        <a:srgbClr val="D4F7DE"/>
                       </a:solidFill>
                       <a:prstDash val="solid"/>
                     </a:lnL>
                     <a:lnR w="9525" cap="flat" cmpd="sng" algn="ctr">
                       <a:solidFill>
-                        <a:srgbClr val="D0F1DA"/>
+                        <a:srgbClr val="D4F7DE"/>
                       </a:solidFill>
                       <a:prstDash val="solid"/>
                     </a:lnR>
                     <a:lnT w="9525" cap="flat" cmpd="sng" algn="ctr">
                       <a:solidFill>
-                        <a:srgbClr val="D0F1DA"/>
+                        <a:srgbClr val="D4F7DE"/>
                       </a:solidFill>
                       <a:prstDash val="solid"/>
                     </a:lnT>
                     <a:lnB w="9525" cap="flat" cmpd="sng" algn="ctr">
                       <a:solidFill>
-                        <a:srgbClr val="D0F1DA"/>
+                        <a:srgbClr val="D4F7DE"/>
                       </a:solidFill>
                       <a:prstDash val="solid"/>
                     </a:lnB>
                     <a:solidFill>
-                      <a:srgbClr val="F0FAF3"/>
+                      <a:srgbClr val="F3FCF6"/>
                     </a:solidFill>
                   </a:tcPr>
                 </a:tc>
@@ -7309,7 +7309,7 @@
                       <a:r>
                         <a:rPr sz="1400" b="1">
                           <a:solidFill>
-                            <a:srgbClr val="143D21"/>
+                            <a:srgbClr val="1D7236"/>
                           </a:solidFill>
                         </a:rPr>
                         <a:t>입원·수술</a:t>
@@ -7319,30 +7319,30 @@
                   <a:tcPr anchor="ctr" marL="73152" marR="73152">
                     <a:lnL w="9525" cap="flat" cmpd="sng" algn="ctr">
                       <a:solidFill>
-                        <a:srgbClr val="D0F1DA"/>
+                        <a:srgbClr val="D4F7DE"/>
                       </a:solidFill>
                       <a:prstDash val="solid"/>
                     </a:lnL>
                     <a:lnR w="9525" cap="flat" cmpd="sng" algn="ctr">
                       <a:solidFill>
-                        <a:srgbClr val="D0F1DA"/>
+                        <a:srgbClr val="D4F7DE"/>
                       </a:solidFill>
                       <a:prstDash val="solid"/>
                     </a:lnR>
                     <a:lnT w="9525" cap="flat" cmpd="sng" algn="ctr">
                       <a:solidFill>
-                        <a:srgbClr val="D0F1DA"/>
+                        <a:srgbClr val="D4F7DE"/>
                       </a:solidFill>
                       <a:prstDash val="solid"/>
                     </a:lnT>
                     <a:lnB w="9525" cap="flat" cmpd="sng" algn="ctr">
                       <a:solidFill>
-                        <a:srgbClr val="D0F1DA"/>
+                        <a:srgbClr val="D4F7DE"/>
                       </a:solidFill>
                       <a:prstDash val="solid"/>
                     </a:lnB>
                     <a:solidFill>
-                      <a:srgbClr val="D0F1DA"/>
+                      <a:srgbClr val="D4F7DE"/>
                     </a:solidFill>
                   </a:tcPr>
                 </a:tc>
@@ -7365,25 +7365,25 @@
                   <a:tcPr anchor="ctr" marL="73152" marR="73152">
                     <a:lnL w="9525" cap="flat" cmpd="sng" algn="ctr">
                       <a:solidFill>
-                        <a:srgbClr val="D0F1DA"/>
+                        <a:srgbClr val="D4F7DE"/>
                       </a:solidFill>
                       <a:prstDash val="solid"/>
                     </a:lnL>
                     <a:lnR w="9525" cap="flat" cmpd="sng" algn="ctr">
                       <a:solidFill>
-                        <a:srgbClr val="D0F1DA"/>
+                        <a:srgbClr val="D4F7DE"/>
                       </a:solidFill>
                       <a:prstDash val="solid"/>
                     </a:lnR>
                     <a:lnT w="9525" cap="flat" cmpd="sng" algn="ctr">
                       <a:solidFill>
-                        <a:srgbClr val="D0F1DA"/>
+                        <a:srgbClr val="D4F7DE"/>
                       </a:solidFill>
                       <a:prstDash val="solid"/>
                     </a:lnT>
                     <a:lnB w="9525" cap="flat" cmpd="sng" algn="ctr">
                       <a:solidFill>
-                        <a:srgbClr val="D0F1DA"/>
+                        <a:srgbClr val="D4F7DE"/>
                       </a:solidFill>
                       <a:prstDash val="solid"/>
                     </a:lnB>
@@ -7411,25 +7411,25 @@
                   <a:tcPr anchor="ctr" marL="73152" marR="73152">
                     <a:lnL w="9525" cap="flat" cmpd="sng" algn="ctr">
                       <a:solidFill>
-                        <a:srgbClr val="D0F1DA"/>
+                        <a:srgbClr val="D4F7DE"/>
                       </a:solidFill>
                       <a:prstDash val="solid"/>
                     </a:lnL>
                     <a:lnR w="9525" cap="flat" cmpd="sng" algn="ctr">
                       <a:solidFill>
-                        <a:srgbClr val="D0F1DA"/>
+                        <a:srgbClr val="D4F7DE"/>
                       </a:solidFill>
                       <a:prstDash val="solid"/>
                     </a:lnR>
                     <a:lnT w="9525" cap="flat" cmpd="sng" algn="ctr">
                       <a:solidFill>
-                        <a:srgbClr val="D0F1DA"/>
+                        <a:srgbClr val="D4F7DE"/>
                       </a:solidFill>
                       <a:prstDash val="solid"/>
                     </a:lnT>
                     <a:lnB w="9525" cap="flat" cmpd="sng" algn="ctr">
                       <a:solidFill>
-                        <a:srgbClr val="D0F1DA"/>
+                        <a:srgbClr val="D4F7DE"/>
                       </a:solidFill>
                       <a:prstDash val="solid"/>
                     </a:lnB>
@@ -7457,25 +7457,25 @@
                   <a:tcPr anchor="ctr" marL="73152" marR="73152">
                     <a:lnL w="9525" cap="flat" cmpd="sng" algn="ctr">
                       <a:solidFill>
-                        <a:srgbClr val="D0F1DA"/>
+                        <a:srgbClr val="D4F7DE"/>
                       </a:solidFill>
                       <a:prstDash val="solid"/>
                     </a:lnL>
                     <a:lnR w="9525" cap="flat" cmpd="sng" algn="ctr">
                       <a:solidFill>
-                        <a:srgbClr val="D0F1DA"/>
+                        <a:srgbClr val="D4F7DE"/>
                       </a:solidFill>
                       <a:prstDash val="solid"/>
                     </a:lnR>
                     <a:lnT w="9525" cap="flat" cmpd="sng" algn="ctr">
                       <a:solidFill>
-                        <a:srgbClr val="D0F1DA"/>
+                        <a:srgbClr val="D4F7DE"/>
                       </a:solidFill>
                       <a:prstDash val="solid"/>
                     </a:lnT>
                     <a:lnB w="9525" cap="flat" cmpd="sng" algn="ctr">
                       <a:solidFill>
-                        <a:srgbClr val="D0F1DA"/>
+                        <a:srgbClr val="D4F7DE"/>
                       </a:solidFill>
                       <a:prstDash val="solid"/>
                     </a:lnB>
@@ -7495,7 +7495,7 @@
                       <a:r>
                         <a:rPr sz="1400" b="1">
                           <a:solidFill>
-                            <a:srgbClr val="143D21"/>
+                            <a:srgbClr val="1D7236"/>
                           </a:solidFill>
                         </a:rPr>
                         <a:t>상해</a:t>
@@ -7505,30 +7505,30 @@
                   <a:tcPr anchor="ctr" marL="73152" marR="73152">
                     <a:lnL w="9525" cap="flat" cmpd="sng" algn="ctr">
                       <a:solidFill>
-                        <a:srgbClr val="D0F1DA"/>
+                        <a:srgbClr val="D4F7DE"/>
                       </a:solidFill>
                       <a:prstDash val="solid"/>
                     </a:lnL>
                     <a:lnR w="9525" cap="flat" cmpd="sng" algn="ctr">
                       <a:solidFill>
-                        <a:srgbClr val="D0F1DA"/>
+                        <a:srgbClr val="D4F7DE"/>
                       </a:solidFill>
                       <a:prstDash val="solid"/>
                     </a:lnR>
                     <a:lnT w="9525" cap="flat" cmpd="sng" algn="ctr">
                       <a:solidFill>
-                        <a:srgbClr val="D0F1DA"/>
+                        <a:srgbClr val="D4F7DE"/>
                       </a:solidFill>
                       <a:prstDash val="solid"/>
                     </a:lnT>
                     <a:lnB w="9525" cap="flat" cmpd="sng" algn="ctr">
                       <a:solidFill>
-                        <a:srgbClr val="D0F1DA"/>
+                        <a:srgbClr val="D4F7DE"/>
                       </a:solidFill>
                       <a:prstDash val="solid"/>
                     </a:lnB>
                     <a:solidFill>
-                      <a:srgbClr val="D0F1DA"/>
+                      <a:srgbClr val="D4F7DE"/>
                     </a:solidFill>
                   </a:tcPr>
                 </a:tc>
@@ -7551,30 +7551,30 @@
                   <a:tcPr anchor="ctr" marL="73152" marR="73152">
                     <a:lnL w="9525" cap="flat" cmpd="sng" algn="ctr">
                       <a:solidFill>
-                        <a:srgbClr val="D0F1DA"/>
+                        <a:srgbClr val="D4F7DE"/>
                       </a:solidFill>
                       <a:prstDash val="solid"/>
                     </a:lnL>
                     <a:lnR w="9525" cap="flat" cmpd="sng" algn="ctr">
                       <a:solidFill>
-                        <a:srgbClr val="D0F1DA"/>
+                        <a:srgbClr val="D4F7DE"/>
                       </a:solidFill>
                       <a:prstDash val="solid"/>
                     </a:lnR>
                     <a:lnT w="9525" cap="flat" cmpd="sng" algn="ctr">
                       <a:solidFill>
-                        <a:srgbClr val="D0F1DA"/>
+                        <a:srgbClr val="D4F7DE"/>
                       </a:solidFill>
                       <a:prstDash val="solid"/>
                     </a:lnT>
                     <a:lnB w="9525" cap="flat" cmpd="sng" algn="ctr">
                       <a:solidFill>
-                        <a:srgbClr val="D0F1DA"/>
+                        <a:srgbClr val="D4F7DE"/>
                       </a:solidFill>
                       <a:prstDash val="solid"/>
                     </a:lnB>
                     <a:solidFill>
-                      <a:srgbClr val="F0FAF3"/>
+                      <a:srgbClr val="F3FCF6"/>
                     </a:solidFill>
                   </a:tcPr>
                 </a:tc>
@@ -7597,30 +7597,30 @@
                   <a:tcPr anchor="ctr" marL="73152" marR="73152">
                     <a:lnL w="9525" cap="flat" cmpd="sng" algn="ctr">
                       <a:solidFill>
-                        <a:srgbClr val="D0F1DA"/>
+                        <a:srgbClr val="D4F7DE"/>
                       </a:solidFill>
                       <a:prstDash val="solid"/>
                     </a:lnL>
                     <a:lnR w="9525" cap="flat" cmpd="sng" algn="ctr">
                       <a:solidFill>
-                        <a:srgbClr val="D0F1DA"/>
+                        <a:srgbClr val="D4F7DE"/>
                       </a:solidFill>
                       <a:prstDash val="solid"/>
                     </a:lnR>
                     <a:lnT w="9525" cap="flat" cmpd="sng" algn="ctr">
                       <a:solidFill>
-                        <a:srgbClr val="D0F1DA"/>
+                        <a:srgbClr val="D4F7DE"/>
                       </a:solidFill>
                       <a:prstDash val="solid"/>
                     </a:lnT>
                     <a:lnB w="9525" cap="flat" cmpd="sng" algn="ctr">
                       <a:solidFill>
-                        <a:srgbClr val="D0F1DA"/>
+                        <a:srgbClr val="D4F7DE"/>
                       </a:solidFill>
                       <a:prstDash val="solid"/>
                     </a:lnB>
                     <a:solidFill>
-                      <a:srgbClr val="F0FAF3"/>
+                      <a:srgbClr val="F3FCF6"/>
                     </a:solidFill>
                   </a:tcPr>
                 </a:tc>
@@ -7643,30 +7643,30 @@
                   <a:tcPr anchor="ctr" marL="73152" marR="73152">
                     <a:lnL w="9525" cap="flat" cmpd="sng" algn="ctr">
                       <a:solidFill>
-                        <a:srgbClr val="D0F1DA"/>
+                        <a:srgbClr val="D4F7DE"/>
                       </a:solidFill>
                       <a:prstDash val="solid"/>
                     </a:lnL>
                     <a:lnR w="9525" cap="flat" cmpd="sng" algn="ctr">
                       <a:solidFill>
-                        <a:srgbClr val="D0F1DA"/>
+                        <a:srgbClr val="D4F7DE"/>
                       </a:solidFill>
                       <a:prstDash val="solid"/>
                     </a:lnR>
                     <a:lnT w="9525" cap="flat" cmpd="sng" algn="ctr">
                       <a:solidFill>
-                        <a:srgbClr val="D0F1DA"/>
+                        <a:srgbClr val="D4F7DE"/>
                       </a:solidFill>
                       <a:prstDash val="solid"/>
                     </a:lnT>
                     <a:lnB w="9525" cap="flat" cmpd="sng" algn="ctr">
                       <a:solidFill>
-                        <a:srgbClr val="D0F1DA"/>
+                        <a:srgbClr val="D4F7DE"/>
                       </a:solidFill>
                       <a:prstDash val="solid"/>
                     </a:lnB>
                     <a:solidFill>
-                      <a:srgbClr val="F0FAF3"/>
+                      <a:srgbClr val="F3FCF6"/>
                     </a:solidFill>
                   </a:tcPr>
                 </a:tc>
@@ -7681,7 +7681,7 @@
                       <a:r>
                         <a:rPr sz="1400" b="1">
                           <a:solidFill>
-                            <a:srgbClr val="143D21"/>
+                            <a:srgbClr val="1D7236"/>
                           </a:solidFill>
                         </a:rPr>
                         <a:t>실손의료</a:t>
@@ -7691,30 +7691,30 @@
                   <a:tcPr anchor="ctr" marL="73152" marR="73152">
                     <a:lnL w="9525" cap="flat" cmpd="sng" algn="ctr">
                       <a:solidFill>
-                        <a:srgbClr val="D0F1DA"/>
+                        <a:srgbClr val="D4F7DE"/>
                       </a:solidFill>
                       <a:prstDash val="solid"/>
                     </a:lnL>
                     <a:lnR w="9525" cap="flat" cmpd="sng" algn="ctr">
                       <a:solidFill>
-                        <a:srgbClr val="D0F1DA"/>
+                        <a:srgbClr val="D4F7DE"/>
                       </a:solidFill>
                       <a:prstDash val="solid"/>
                     </a:lnR>
                     <a:lnT w="9525" cap="flat" cmpd="sng" algn="ctr">
                       <a:solidFill>
-                        <a:srgbClr val="D0F1DA"/>
+                        <a:srgbClr val="D4F7DE"/>
                       </a:solidFill>
                       <a:prstDash val="solid"/>
                     </a:lnT>
                     <a:lnB w="9525" cap="flat" cmpd="sng" algn="ctr">
                       <a:solidFill>
-                        <a:srgbClr val="D0F1DA"/>
+                        <a:srgbClr val="D4F7DE"/>
                       </a:solidFill>
                       <a:prstDash val="solid"/>
                     </a:lnB>
                     <a:solidFill>
-                      <a:srgbClr val="D0F1DA"/>
+                      <a:srgbClr val="D4F7DE"/>
                     </a:solidFill>
                   </a:tcPr>
                 </a:tc>
@@ -7737,25 +7737,25 @@
                   <a:tcPr anchor="ctr" marL="73152" marR="73152">
                     <a:lnL w="9525" cap="flat" cmpd="sng" algn="ctr">
                       <a:solidFill>
-                        <a:srgbClr val="D0F1DA"/>
+                        <a:srgbClr val="D4F7DE"/>
                       </a:solidFill>
                       <a:prstDash val="solid"/>
                     </a:lnL>
                     <a:lnR w="9525" cap="flat" cmpd="sng" algn="ctr">
                       <a:solidFill>
-                        <a:srgbClr val="D0F1DA"/>
+                        <a:srgbClr val="D4F7DE"/>
                       </a:solidFill>
                       <a:prstDash val="solid"/>
                     </a:lnR>
                     <a:lnT w="9525" cap="flat" cmpd="sng" algn="ctr">
                       <a:solidFill>
-                        <a:srgbClr val="D0F1DA"/>
+                        <a:srgbClr val="D4F7DE"/>
                       </a:solidFill>
                       <a:prstDash val="solid"/>
                     </a:lnT>
                     <a:lnB w="9525" cap="flat" cmpd="sng" algn="ctr">
                       <a:solidFill>
-                        <a:srgbClr val="D0F1DA"/>
+                        <a:srgbClr val="D4F7DE"/>
                       </a:solidFill>
                       <a:prstDash val="solid"/>
                     </a:lnB>
@@ -7783,25 +7783,25 @@
                   <a:tcPr anchor="ctr" marL="73152" marR="73152">
                     <a:lnL w="9525" cap="flat" cmpd="sng" algn="ctr">
                       <a:solidFill>
-                        <a:srgbClr val="D0F1DA"/>
+                        <a:srgbClr val="D4F7DE"/>
                       </a:solidFill>
                       <a:prstDash val="solid"/>
                     </a:lnL>
                     <a:lnR w="9525" cap="flat" cmpd="sng" algn="ctr">
                       <a:solidFill>
-                        <a:srgbClr val="D0F1DA"/>
+                        <a:srgbClr val="D4F7DE"/>
                       </a:solidFill>
                       <a:prstDash val="solid"/>
                     </a:lnR>
                     <a:lnT w="9525" cap="flat" cmpd="sng" algn="ctr">
                       <a:solidFill>
-                        <a:srgbClr val="D0F1DA"/>
+                        <a:srgbClr val="D4F7DE"/>
                       </a:solidFill>
                       <a:prstDash val="solid"/>
                     </a:lnT>
                     <a:lnB w="9525" cap="flat" cmpd="sng" algn="ctr">
                       <a:solidFill>
-                        <a:srgbClr val="D0F1DA"/>
+                        <a:srgbClr val="D4F7DE"/>
                       </a:solidFill>
                       <a:prstDash val="solid"/>
                     </a:lnB>
@@ -7829,25 +7829,25 @@
                   <a:tcPr anchor="ctr" marL="73152" marR="73152">
                     <a:lnL w="9525" cap="flat" cmpd="sng" algn="ctr">
                       <a:solidFill>
-                        <a:srgbClr val="D0F1DA"/>
+                        <a:srgbClr val="D4F7DE"/>
                       </a:solidFill>
                       <a:prstDash val="solid"/>
                     </a:lnL>
                     <a:lnR w="9525" cap="flat" cmpd="sng" algn="ctr">
                       <a:solidFill>
-                        <a:srgbClr val="D0F1DA"/>
+                        <a:srgbClr val="D4F7DE"/>
                       </a:solidFill>
                       <a:prstDash val="solid"/>
                     </a:lnR>
                     <a:lnT w="9525" cap="flat" cmpd="sng" algn="ctr">
                       <a:solidFill>
-                        <a:srgbClr val="D0F1DA"/>
+                        <a:srgbClr val="D4F7DE"/>
                       </a:solidFill>
                       <a:prstDash val="solid"/>
                     </a:lnT>
                     <a:lnB w="9525" cap="flat" cmpd="sng" algn="ctr">
                       <a:solidFill>
-                        <a:srgbClr val="D0F1DA"/>
+                        <a:srgbClr val="D4F7DE"/>
                       </a:solidFill>
                       <a:prstDash val="solid"/>
                     </a:lnB>
@@ -7867,7 +7867,7 @@
                       <a:r>
                         <a:rPr sz="1400" b="1">
                           <a:solidFill>
-                            <a:srgbClr val="143D21"/>
+                            <a:srgbClr val="1D7236"/>
                           </a:solidFill>
                         </a:rPr>
                         <a:t>연금·노후자금</a:t>
@@ -7877,30 +7877,30 @@
                   <a:tcPr anchor="ctr" marL="73152" marR="73152">
                     <a:lnL w="9525" cap="flat" cmpd="sng" algn="ctr">
                       <a:solidFill>
-                        <a:srgbClr val="D0F1DA"/>
+                        <a:srgbClr val="D4F7DE"/>
                       </a:solidFill>
                       <a:prstDash val="solid"/>
                     </a:lnL>
                     <a:lnR w="9525" cap="flat" cmpd="sng" algn="ctr">
                       <a:solidFill>
-                        <a:srgbClr val="D0F1DA"/>
+                        <a:srgbClr val="D4F7DE"/>
                       </a:solidFill>
                       <a:prstDash val="solid"/>
                     </a:lnR>
                     <a:lnT w="9525" cap="flat" cmpd="sng" algn="ctr">
                       <a:solidFill>
-                        <a:srgbClr val="D0F1DA"/>
+                        <a:srgbClr val="D4F7DE"/>
                       </a:solidFill>
                       <a:prstDash val="solid"/>
                     </a:lnT>
                     <a:lnB w="9525" cap="flat" cmpd="sng" algn="ctr">
                       <a:solidFill>
-                        <a:srgbClr val="D0F1DA"/>
+                        <a:srgbClr val="D4F7DE"/>
                       </a:solidFill>
                       <a:prstDash val="solid"/>
                     </a:lnB>
                     <a:solidFill>
-                      <a:srgbClr val="D0F1DA"/>
+                      <a:srgbClr val="D4F7DE"/>
                     </a:solidFill>
                   </a:tcPr>
                 </a:tc>
@@ -7923,30 +7923,30 @@
                   <a:tcPr anchor="ctr" marL="73152" marR="73152">
                     <a:lnL w="9525" cap="flat" cmpd="sng" algn="ctr">
                       <a:solidFill>
-                        <a:srgbClr val="D0F1DA"/>
+                        <a:srgbClr val="D4F7DE"/>
                       </a:solidFill>
                       <a:prstDash val="solid"/>
                     </a:lnL>
                     <a:lnR w="9525" cap="flat" cmpd="sng" algn="ctr">
                       <a:solidFill>
-                        <a:srgbClr val="D0F1DA"/>
+                        <a:srgbClr val="D4F7DE"/>
                       </a:solidFill>
                       <a:prstDash val="solid"/>
                     </a:lnR>
                     <a:lnT w="9525" cap="flat" cmpd="sng" algn="ctr">
                       <a:solidFill>
-                        <a:srgbClr val="D0F1DA"/>
+                        <a:srgbClr val="D4F7DE"/>
                       </a:solidFill>
                       <a:prstDash val="solid"/>
                     </a:lnT>
                     <a:lnB w="9525" cap="flat" cmpd="sng" algn="ctr">
                       <a:solidFill>
-                        <a:srgbClr val="D0F1DA"/>
+                        <a:srgbClr val="D4F7DE"/>
                       </a:solidFill>
                       <a:prstDash val="solid"/>
                     </a:lnB>
                     <a:solidFill>
-                      <a:srgbClr val="F0FAF3"/>
+                      <a:srgbClr val="F3FCF6"/>
                     </a:solidFill>
                   </a:tcPr>
                 </a:tc>
@@ -7969,30 +7969,30 @@
                   <a:tcPr anchor="ctr" marL="73152" marR="73152">
                     <a:lnL w="9525" cap="flat" cmpd="sng" algn="ctr">
                       <a:solidFill>
-                        <a:srgbClr val="D0F1DA"/>
+                        <a:srgbClr val="D4F7DE"/>
                       </a:solidFill>
                       <a:prstDash val="solid"/>
                     </a:lnL>
                     <a:lnR w="9525" cap="flat" cmpd="sng" algn="ctr">
                       <a:solidFill>
-                        <a:srgbClr val="D0F1DA"/>
+                        <a:srgbClr val="D4F7DE"/>
                       </a:solidFill>
                       <a:prstDash val="solid"/>
                     </a:lnR>
                     <a:lnT w="9525" cap="flat" cmpd="sng" algn="ctr">
                       <a:solidFill>
-                        <a:srgbClr val="D0F1DA"/>
+                        <a:srgbClr val="D4F7DE"/>
                       </a:solidFill>
                       <a:prstDash val="solid"/>
                     </a:lnT>
                     <a:lnB w="9525" cap="flat" cmpd="sng" algn="ctr">
                       <a:solidFill>
-                        <a:srgbClr val="D0F1DA"/>
+                        <a:srgbClr val="D4F7DE"/>
                       </a:solidFill>
                       <a:prstDash val="solid"/>
                     </a:lnB>
                     <a:solidFill>
-                      <a:srgbClr val="F0FAF3"/>
+                      <a:srgbClr val="F3FCF6"/>
                     </a:solidFill>
                   </a:tcPr>
                 </a:tc>
@@ -8015,30 +8015,30 @@
                   <a:tcPr anchor="ctr" marL="73152" marR="73152">
                     <a:lnL w="9525" cap="flat" cmpd="sng" algn="ctr">
                       <a:solidFill>
-                        <a:srgbClr val="D0F1DA"/>
+                        <a:srgbClr val="D4F7DE"/>
                       </a:solidFill>
                       <a:prstDash val="solid"/>
                     </a:lnL>
                     <a:lnR w="9525" cap="flat" cmpd="sng" algn="ctr">
                       <a:solidFill>
-                        <a:srgbClr val="D0F1DA"/>
+                        <a:srgbClr val="D4F7DE"/>
                       </a:solidFill>
                       <a:prstDash val="solid"/>
                     </a:lnR>
                     <a:lnT w="9525" cap="flat" cmpd="sng" algn="ctr">
                       <a:solidFill>
-                        <a:srgbClr val="D0F1DA"/>
+                        <a:srgbClr val="D4F7DE"/>
                       </a:solidFill>
                       <a:prstDash val="solid"/>
                     </a:lnT>
                     <a:lnB w="9525" cap="flat" cmpd="sng" algn="ctr">
                       <a:solidFill>
-                        <a:srgbClr val="D0F1DA"/>
+                        <a:srgbClr val="D4F7DE"/>
                       </a:solidFill>
                       <a:prstDash val="solid"/>
                     </a:lnB>
                     <a:solidFill>
-                      <a:srgbClr val="F0FAF3"/>
+                      <a:srgbClr val="F3FCF6"/>
                     </a:solidFill>
                   </a:tcPr>
                 </a:tc>
@@ -8061,7 +8061,7 @@
     <p:bg>
       <p:bgPr>
         <a:solidFill>
-          <a:srgbClr val="D0F1DA"/>
+          <a:srgbClr val="D4F7DE"/>
         </a:solidFill>
         <a:effectLst/>
       </p:bgPr>
@@ -8092,7 +8092,7 @@
           </a:solidFill>
           <a:ln w="25400">
             <a:solidFill>
-              <a:srgbClr val="2B8245"/>
+              <a:srgbClr val="43D66F"/>
             </a:solidFill>
             <a:prstDash val="dash"/>
           </a:ln>
@@ -8135,7 +8135,7 @@
             <a:r>
               <a:rPr sz="3000" b="1" i="0">
                 <a:solidFill>
-                  <a:srgbClr val="143D21"/>
+                  <a:srgbClr val="1D7236"/>
                 </a:solidFill>
               </a:rPr>
               <a:t>월 보험료 한눈에</a:t>
@@ -8160,11 +8160,11 @@
             </a:avLst>
           </a:prstGeom>
           <a:solidFill>
-            <a:srgbClr val="F0FAF3"/>
+            <a:srgbClr val="F3FCF6"/>
           </a:solidFill>
           <a:ln w="15875">
             <a:solidFill>
-              <a:srgbClr val="D0F1DA"/>
+              <a:srgbClr val="D4F7DE"/>
             </a:solidFill>
           </a:ln>
         </p:spPr>
@@ -8191,7 +8191,7 @@
             <a:avLst/>
           </a:prstGeom>
           <a:solidFill>
-            <a:srgbClr val="2B8245"/>
+            <a:srgbClr val="43D66F"/>
           </a:solidFill>
           <a:ln>
             <a:noFill/>
@@ -8249,7 +8249,7 @@
             <a:r>
               <a:rPr sz="1700" b="1" i="0">
                 <a:solidFill>
-                  <a:srgbClr val="143D21"/>
+                  <a:srgbClr val="1D7236"/>
                 </a:solidFill>
               </a:rPr>
               <a:t>월 보험료 합계</a:t>
@@ -8312,11 +8312,11 @@
             </a:avLst>
           </a:prstGeom>
           <a:solidFill>
-            <a:srgbClr val="F0FAF3"/>
+            <a:srgbClr val="F3FCF6"/>
           </a:solidFill>
           <a:ln w="15875">
             <a:solidFill>
-              <a:srgbClr val="D0F1DA"/>
+              <a:srgbClr val="D4F7DE"/>
             </a:solidFill>
           </a:ln>
         </p:spPr>
@@ -8343,7 +8343,7 @@
             <a:avLst/>
           </a:prstGeom>
           <a:solidFill>
-            <a:srgbClr val="2B8245"/>
+            <a:srgbClr val="43D66F"/>
           </a:solidFill>
           <a:ln>
             <a:noFill/>
@@ -8401,7 +8401,7 @@
             <a:r>
               <a:rPr sz="1700" b="1" i="0">
                 <a:solidFill>
-                  <a:srgbClr val="143D21"/>
+                  <a:srgbClr val="1D7236"/>
                 </a:solidFill>
               </a:rPr>
               <a:t>연 보험료 합계</a:t>
@@ -8464,11 +8464,11 @@
             </a:avLst>
           </a:prstGeom>
           <a:solidFill>
-            <a:srgbClr val="F0FAF3"/>
+            <a:srgbClr val="F3FCF6"/>
           </a:solidFill>
           <a:ln w="15875">
             <a:solidFill>
-              <a:srgbClr val="D0F1DA"/>
+              <a:srgbClr val="D4F7DE"/>
             </a:solidFill>
           </a:ln>
         </p:spPr>
@@ -8495,7 +8495,7 @@
             <a:avLst/>
           </a:prstGeom>
           <a:solidFill>
-            <a:srgbClr val="2B8245"/>
+            <a:srgbClr val="43D66F"/>
           </a:solidFill>
           <a:ln>
             <a:noFill/>
@@ -8553,7 +8553,7 @@
             <a:r>
               <a:rPr sz="1700" b="1" i="0">
                 <a:solidFill>
-                  <a:srgbClr val="143D21"/>
+                  <a:srgbClr val="1D7236"/>
                 </a:solidFill>
               </a:rPr>
               <a:t>월 소득 대비</a:t>
@@ -8651,7 +8651,7 @@
     <p:bg>
       <p:bgPr>
         <a:solidFill>
-          <a:srgbClr val="D0F1DA"/>
+          <a:srgbClr val="D4F7DE"/>
         </a:solidFill>
         <a:effectLst/>
       </p:bgPr>
@@ -8682,7 +8682,7 @@
           </a:solidFill>
           <a:ln w="25400">
             <a:solidFill>
-              <a:srgbClr val="2B8245"/>
+              <a:srgbClr val="43D66F"/>
             </a:solidFill>
             <a:prstDash val="dash"/>
           </a:ln>
@@ -8725,7 +8725,7 @@
             <a:r>
               <a:rPr sz="3000" b="1" i="0">
                 <a:solidFill>
-                  <a:srgbClr val="143D21"/>
+                  <a:srgbClr val="1D7236"/>
                 </a:solidFill>
               </a:rPr>
               <a:t>점검 메모와 다음 할 일</a:t>
@@ -8750,11 +8750,11 @@
             </a:avLst>
           </a:prstGeom>
           <a:solidFill>
-            <a:srgbClr val="F0FAF3"/>
+            <a:srgbClr val="F3FCF6"/>
           </a:solidFill>
           <a:ln w="15875">
             <a:solidFill>
-              <a:srgbClr val="D0F1DA"/>
+              <a:srgbClr val="D4F7DE"/>
             </a:solidFill>
           </a:ln>
         </p:spPr>
@@ -8781,7 +8781,7 @@
             <a:avLst/>
           </a:prstGeom>
           <a:solidFill>
-            <a:srgbClr val="2B8245"/>
+            <a:srgbClr val="43D66F"/>
           </a:solidFill>
           <a:ln>
             <a:noFill/>
@@ -8839,7 +8839,7 @@
             <a:r>
               <a:rPr sz="1800" b="1" i="0">
                 <a:solidFill>
-                  <a:srgbClr val="143D21"/>
+                  <a:srgbClr val="1D7236"/>
                 </a:solidFill>
               </a:rPr>
               <a:t>확인할 것</a:t>
@@ -8902,11 +8902,11 @@
             </a:avLst>
           </a:prstGeom>
           <a:solidFill>
-            <a:srgbClr val="F0FAF3"/>
+            <a:srgbClr val="F3FCF6"/>
           </a:solidFill>
           <a:ln w="15875">
             <a:solidFill>
-              <a:srgbClr val="D0F1DA"/>
+              <a:srgbClr val="D4F7DE"/>
             </a:solidFill>
           </a:ln>
         </p:spPr>
@@ -8933,7 +8933,7 @@
             <a:avLst/>
           </a:prstGeom>
           <a:solidFill>
-            <a:srgbClr val="2B8245"/>
+            <a:srgbClr val="43D66F"/>
           </a:solidFill>
           <a:ln>
             <a:noFill/>
@@ -8991,7 +8991,7 @@
             <a:r>
               <a:rPr sz="1800" b="1" i="0">
                 <a:solidFill>
-                  <a:srgbClr val="143D21"/>
+                  <a:srgbClr val="1D7236"/>
                 </a:solidFill>
               </a:rPr>
               <a:t>문의할 것</a:t>
@@ -9054,11 +9054,11 @@
             </a:avLst>
           </a:prstGeom>
           <a:solidFill>
-            <a:srgbClr val="F0FAF3"/>
+            <a:srgbClr val="F3FCF6"/>
           </a:solidFill>
           <a:ln w="15875">
             <a:solidFill>
-              <a:srgbClr val="D0F1DA"/>
+              <a:srgbClr val="D4F7DE"/>
             </a:solidFill>
           </a:ln>
         </p:spPr>
@@ -9085,7 +9085,7 @@
             <a:avLst/>
           </a:prstGeom>
           <a:solidFill>
-            <a:srgbClr val="2B8245"/>
+            <a:srgbClr val="43D66F"/>
           </a:solidFill>
           <a:ln>
             <a:noFill/>
@@ -9143,7 +9143,7 @@
             <a:r>
               <a:rPr sz="1800" b="1" i="0">
                 <a:solidFill>
-                  <a:srgbClr val="143D21"/>
+                  <a:srgbClr val="1D7236"/>
                 </a:solidFill>
               </a:rPr>
               <a:t>정리할 날짜</a:t>
@@ -9246,34 +9246,34 @@
         <a:sysClr val="window" lastClr="FFFFFF"/>
       </a:lt1>
       <a:dk2>
-        <a:srgbClr val="143D21"/>
+        <a:srgbClr val="1D7236"/>
       </a:dk2>
       <a:lt2>
-        <a:srgbClr val="F0FAF3"/>
+        <a:srgbClr val="F3FCF6"/>
       </a:lt2>
       <a:accent1>
-        <a:srgbClr val="2B8245"/>
+        <a:srgbClr val="43D66F"/>
       </a:accent1>
       <a:accent2>
-        <a:srgbClr val="803B91"/>
+        <a:srgbClr val="339941"/>
       </a:accent2>
       <a:accent3>
-        <a:srgbClr val="143D21"/>
+        <a:srgbClr val="1D7236"/>
       </a:accent3>
       <a:accent4>
-        <a:srgbClr val="D0F1DA"/>
+        <a:srgbClr val="D4F7DE"/>
       </a:accent4>
       <a:accent5>
-        <a:srgbClr val="565E6B"/>
+        <a:srgbClr val="3BB858"/>
       </a:accent5>
       <a:accent6>
-        <a:srgbClr val="728B7A"/>
+        <a:srgbClr val="77AA86"/>
       </a:accent6>
       <a:hlink>
-        <a:srgbClr val="2B8245"/>
+        <a:srgbClr val="43D66F"/>
       </a:hlink>
       <a:folHlink>
-        <a:srgbClr val="143D21"/>
+        <a:srgbClr val="1D7236"/>
       </a:folHlink>
     </a:clrScheme>
     <a:fontScheme name="Office">
